--- a/statistics_06b_hypothesis_testing_p_val.pptx
+++ b/statistics_06b_hypothesis_testing_p_val.pptx
@@ -9,11 +9,11 @@
   </p:notesMasterIdLst>
   <p:sldIdLst>
     <p:sldId id="384" r:id="rId2"/>
-    <p:sldId id="353" r:id="rId3"/>
-    <p:sldId id="316" r:id="rId4"/>
-    <p:sldId id="383" r:id="rId5"/>
-    <p:sldId id="258" r:id="rId6"/>
-    <p:sldId id="323" r:id="rId7"/>
+    <p:sldId id="258" r:id="rId3"/>
+    <p:sldId id="323" r:id="rId4"/>
+    <p:sldId id="353" r:id="rId5"/>
+    <p:sldId id="316" r:id="rId6"/>
+    <p:sldId id="383" r:id="rId7"/>
     <p:sldId id="320" r:id="rId8"/>
     <p:sldId id="354" r:id="rId9"/>
     <p:sldId id="319" r:id="rId10"/>
@@ -22812,6 +22812,2186 @@
   <p:cSld>
     <p:spTree>
       <p:nvGrpSpPr>
+        <p:cNvPr id="1" name="Shape 105"/>
+        <p:cNvGrpSpPr/>
+        <p:nvPr/>
+      </p:nvGrpSpPr>
+      <p:grpSpPr>
+        <a:xfrm>
+          <a:off x="0" y="0"/>
+          <a:ext cx="0" cy="0"/>
+          <a:chOff x="0" y="0"/>
+          <a:chExt cx="0" cy="0"/>
+        </a:xfrm>
+      </p:grpSpPr>
+      <p:sp>
+        <p:nvSpPr>
+          <p:cNvPr id="106" name="Google Shape;106;p15"/>
+          <p:cNvSpPr txBox="1"/>
+          <p:nvPr/>
+        </p:nvSpPr>
+        <p:spPr>
+          <a:xfrm>
+            <a:off x="1" y="0"/>
+            <a:ext cx="4263242" cy="486121"/>
+          </a:xfrm>
+          <a:prstGeom prst="rect">
+            <a:avLst/>
+          </a:prstGeom>
+          <a:noFill/>
+          <a:ln>
+            <a:noFill/>
+          </a:ln>
+        </p:spPr>
+        <p:txBody>
+          <a:bodyPr spcFirstLastPara="1" wrap="square" lIns="91425" tIns="45700" rIns="91425" bIns="45700" anchor="t" anchorCtr="0">
+            <a:noAutofit/>
+          </a:bodyPr>
+          <a:lstStyle/>
+          <a:p>
+            <a:pPr marL="0" marR="0" lvl="0" indent="0" algn="l" rtl="0">
+              <a:spcBef>
+                <a:spcPts val="0"/>
+              </a:spcBef>
+              <a:spcAft>
+                <a:spcPts val="0"/>
+              </a:spcAft>
+              <a:buNone/>
+            </a:pPr>
+            <a:r>
+              <a:rPr lang="en-US" sz="2800" b="1" dirty="0">
+                <a:solidFill>
+                  <a:schemeClr val="dk1"/>
+                </a:solidFill>
+                <a:latin typeface="Calibri"/>
+                <a:ea typeface="Calibri"/>
+                <a:cs typeface="Calibri"/>
+                <a:sym typeface="Calibri"/>
+              </a:rPr>
+              <a:t>p-value &amp; null hypothesis</a:t>
+            </a:r>
+            <a:endParaRPr sz="2800" b="1" dirty="0">
+              <a:solidFill>
+                <a:schemeClr val="dk1"/>
+              </a:solidFill>
+              <a:latin typeface="Calibri"/>
+              <a:ea typeface="Calibri"/>
+              <a:cs typeface="Calibri"/>
+              <a:sym typeface="Calibri"/>
+            </a:endParaRPr>
+          </a:p>
+          <a:p>
+            <a:pPr lvl="0">
+              <a:buSzPts val="1100"/>
+            </a:pPr>
+            <a:endParaRPr dirty="0">
+              <a:solidFill>
+                <a:schemeClr val="dk1"/>
+              </a:solidFill>
+              <a:latin typeface="Calibri"/>
+              <a:ea typeface="Calibri"/>
+              <a:cs typeface="Calibri"/>
+              <a:sym typeface="Calibri"/>
+            </a:endParaRPr>
+          </a:p>
+        </p:txBody>
+      </p:sp>
+      <p:pic>
+        <p:nvPicPr>
+          <p:cNvPr id="107" name="Google Shape;107;p15"/>
+          <p:cNvPicPr preferRelativeResize="0"/>
+          <p:nvPr/>
+        </p:nvPicPr>
+        <p:blipFill rotWithShape="1">
+          <a:blip r:embed="rId3" cstate="email">
+            <a:alphaModFix/>
+            <a:extLst>
+              <a:ext uri="{28A0092B-C50C-407E-A947-70E740481C1C}">
+                <a14:useLocalDpi xmlns:a14="http://schemas.microsoft.com/office/drawing/2010/main"/>
+              </a:ext>
+            </a:extLst>
+          </a:blip>
+          <a:srcRect/>
+          <a:stretch/>
+        </p:blipFill>
+        <p:spPr>
+          <a:xfrm>
+            <a:off x="8085329" y="3040632"/>
+            <a:ext cx="4011671" cy="1803299"/>
+          </a:xfrm>
+          <a:prstGeom prst="rect">
+            <a:avLst/>
+          </a:prstGeom>
+          <a:noFill/>
+          <a:ln>
+            <a:noFill/>
+          </a:ln>
+        </p:spPr>
+      </p:pic>
+      <p:pic>
+        <p:nvPicPr>
+          <p:cNvPr id="6" name="Picture 4" descr="t-test">
+            <a:extLst>
+              <a:ext uri="{FF2B5EF4-FFF2-40B4-BE49-F238E27FC236}">
+                <a16:creationId xmlns:a16="http://schemas.microsoft.com/office/drawing/2014/main" id="{7E958396-6F7B-D340-AA10-24FB8F70B9D9}"/>
+              </a:ext>
+            </a:extLst>
+          </p:cNvPr>
+          <p:cNvPicPr>
+            <a:picLocks noChangeAspect="1" noChangeArrowheads="1"/>
+          </p:cNvPicPr>
+          <p:nvPr/>
+        </p:nvPicPr>
+        <p:blipFill>
+          <a:blip r:embed="rId4">
+            <a:extLst>
+              <a:ext uri="{28A0092B-C50C-407E-A947-70E740481C1C}">
+                <a14:useLocalDpi xmlns:a14="http://schemas.microsoft.com/office/drawing/2010/main"/>
+              </a:ext>
+            </a:extLst>
+          </a:blip>
+          <a:srcRect/>
+          <a:stretch>
+            <a:fillRect/>
+          </a:stretch>
+        </p:blipFill>
+        <p:spPr bwMode="auto">
+          <a:xfrm>
+            <a:off x="8027719" y="486121"/>
+            <a:ext cx="3906187" cy="1409700"/>
+          </a:xfrm>
+          <a:prstGeom prst="rect">
+            <a:avLst/>
+          </a:prstGeom>
+          <a:noFill/>
+          <a:extLst>
+            <a:ext uri="{909E8E84-426E-40DD-AFC4-6F175D3DCCD1}">
+              <a14:hiddenFill xmlns:a14="http://schemas.microsoft.com/office/drawing/2010/main">
+                <a:solidFill>
+                  <a:srgbClr val="FFFFFF"/>
+                </a:solidFill>
+              </a14:hiddenFill>
+            </a:ext>
+          </a:extLst>
+        </p:spPr>
+      </p:pic>
+      <p:sp>
+        <p:nvSpPr>
+          <p:cNvPr id="2" name="TextBox 1">
+            <a:extLst>
+              <a:ext uri="{FF2B5EF4-FFF2-40B4-BE49-F238E27FC236}">
+                <a16:creationId xmlns:a16="http://schemas.microsoft.com/office/drawing/2014/main" id="{70594850-71C2-C441-B6EC-51C01281A53B}"/>
+              </a:ext>
+            </a:extLst>
+          </p:cNvPr>
+          <p:cNvSpPr txBox="1"/>
+          <p:nvPr/>
+        </p:nvSpPr>
+        <p:spPr>
+          <a:xfrm>
+            <a:off x="8763988" y="1998434"/>
+            <a:ext cx="1365662" cy="461665"/>
+          </a:xfrm>
+          <a:prstGeom prst="rect">
+            <a:avLst/>
+          </a:prstGeom>
+          <a:noFill/>
+        </p:spPr>
+        <p:txBody>
+          <a:bodyPr wrap="square" rtlCol="0">
+            <a:spAutoFit/>
+          </a:bodyPr>
+          <a:lstStyle/>
+          <a:p>
+            <a:pPr algn="ctr"/>
+            <a:r>
+              <a:rPr lang="en-US" sz="1200" dirty="0"/>
+              <a:t>reference value</a:t>
+            </a:r>
+          </a:p>
+          <a:p>
+            <a:pPr algn="ctr"/>
+            <a:r>
+              <a:rPr lang="en-US" sz="1200" dirty="0"/>
+              <a:t>(Null Hypothesis)</a:t>
+            </a:r>
+          </a:p>
+        </p:txBody>
+      </p:sp>
+      <p:sp>
+        <p:nvSpPr>
+          <p:cNvPr id="8" name="TextBox 7">
+            <a:extLst>
+              <a:ext uri="{FF2B5EF4-FFF2-40B4-BE49-F238E27FC236}">
+                <a16:creationId xmlns:a16="http://schemas.microsoft.com/office/drawing/2014/main" id="{28796D1A-93C2-EC49-99D3-79EDEEBF5566}"/>
+              </a:ext>
+            </a:extLst>
+          </p:cNvPr>
+          <p:cNvSpPr txBox="1"/>
+          <p:nvPr/>
+        </p:nvSpPr>
+        <p:spPr>
+          <a:xfrm>
+            <a:off x="10028312" y="2002733"/>
+            <a:ext cx="1068780" cy="461665"/>
+          </a:xfrm>
+          <a:prstGeom prst="rect">
+            <a:avLst/>
+          </a:prstGeom>
+          <a:noFill/>
+        </p:spPr>
+        <p:txBody>
+          <a:bodyPr wrap="square" rtlCol="0">
+            <a:spAutoFit/>
+          </a:bodyPr>
+          <a:lstStyle/>
+          <a:p>
+            <a:pPr algn="ctr"/>
+            <a:r>
+              <a:rPr lang="en-US" sz="1200" dirty="0"/>
+              <a:t>observed value</a:t>
+            </a:r>
+          </a:p>
+        </p:txBody>
+      </p:sp>
+      <p:sp>
+        <p:nvSpPr>
+          <p:cNvPr id="9" name="TextBox 8">
+            <a:extLst>
+              <a:ext uri="{FF2B5EF4-FFF2-40B4-BE49-F238E27FC236}">
+                <a16:creationId xmlns:a16="http://schemas.microsoft.com/office/drawing/2014/main" id="{5BDCC29F-9F5C-1440-873D-5D8FB15EF8EF}"/>
+              </a:ext>
+            </a:extLst>
+          </p:cNvPr>
+          <p:cNvSpPr txBox="1"/>
+          <p:nvPr/>
+        </p:nvSpPr>
+        <p:spPr>
+          <a:xfrm>
+            <a:off x="7871569" y="822622"/>
+            <a:ext cx="1068780" cy="461665"/>
+          </a:xfrm>
+          <a:prstGeom prst="rect">
+            <a:avLst/>
+          </a:prstGeom>
+          <a:noFill/>
+        </p:spPr>
+        <p:txBody>
+          <a:bodyPr wrap="square" rtlCol="0">
+            <a:spAutoFit/>
+          </a:bodyPr>
+          <a:lstStyle/>
+          <a:p>
+            <a:pPr algn="ctr"/>
+            <a:r>
+              <a:rPr lang="en-US" sz="1200" dirty="0"/>
+              <a:t>reference distribution</a:t>
+            </a:r>
+          </a:p>
+        </p:txBody>
+      </p:sp>
+      <p:sp>
+        <p:nvSpPr>
+          <p:cNvPr id="10" name="TextBox 9">
+            <a:extLst>
+              <a:ext uri="{FF2B5EF4-FFF2-40B4-BE49-F238E27FC236}">
+                <a16:creationId xmlns:a16="http://schemas.microsoft.com/office/drawing/2014/main" id="{06E408CC-8C53-F245-90B4-0270DB483613}"/>
+              </a:ext>
+            </a:extLst>
+          </p:cNvPr>
+          <p:cNvSpPr txBox="1"/>
+          <p:nvPr/>
+        </p:nvSpPr>
+        <p:spPr>
+          <a:xfrm>
+            <a:off x="11028220" y="822622"/>
+            <a:ext cx="1068780" cy="461665"/>
+          </a:xfrm>
+          <a:prstGeom prst="rect">
+            <a:avLst/>
+          </a:prstGeom>
+          <a:noFill/>
+        </p:spPr>
+        <p:txBody>
+          <a:bodyPr wrap="square" rtlCol="0">
+            <a:spAutoFit/>
+          </a:bodyPr>
+          <a:lstStyle/>
+          <a:p>
+            <a:pPr algn="ctr"/>
+            <a:r>
+              <a:rPr lang="en-US" sz="1200" dirty="0"/>
+              <a:t>observed distribution</a:t>
+            </a:r>
+          </a:p>
+        </p:txBody>
+      </p:sp>
+      <p:sp>
+        <p:nvSpPr>
+          <p:cNvPr id="3" name="TextBox 2">
+            <a:extLst>
+              <a:ext uri="{FF2B5EF4-FFF2-40B4-BE49-F238E27FC236}">
+                <a16:creationId xmlns:a16="http://schemas.microsoft.com/office/drawing/2014/main" id="{54CC6AAC-BE48-F24F-B50C-6FBC87FD3E60}"/>
+              </a:ext>
+            </a:extLst>
+          </p:cNvPr>
+          <p:cNvSpPr txBox="1"/>
+          <p:nvPr/>
+        </p:nvSpPr>
+        <p:spPr>
+          <a:xfrm>
+            <a:off x="8027719" y="4999512"/>
+            <a:ext cx="4069281" cy="1600438"/>
+          </a:xfrm>
+          <a:prstGeom prst="rect">
+            <a:avLst/>
+          </a:prstGeom>
+          <a:noFill/>
+        </p:spPr>
+        <p:txBody>
+          <a:bodyPr wrap="square" rtlCol="0">
+            <a:spAutoFit/>
+          </a:bodyPr>
+          <a:lstStyle/>
+          <a:p>
+            <a:pPr lvl="0">
+              <a:buSzPts val="1100"/>
+            </a:pPr>
+            <a:r>
+              <a:rPr lang="en-US" b="1" dirty="0">
+                <a:solidFill>
+                  <a:srgbClr val="0070C0"/>
+                </a:solidFill>
+                <a:latin typeface="Calibri"/>
+                <a:ea typeface="Calibri"/>
+                <a:cs typeface="Calibri"/>
+                <a:sym typeface="Calibri"/>
+              </a:rPr>
+              <a:t>P-Value:</a:t>
+            </a:r>
+          </a:p>
+          <a:p>
+            <a:pPr lvl="0">
+              <a:buSzPts val="1100"/>
+            </a:pPr>
+            <a:r>
+              <a:rPr lang="en-US" dirty="0">
+                <a:solidFill>
+                  <a:schemeClr val="dk1"/>
+                </a:solidFill>
+                <a:latin typeface="Calibri"/>
+                <a:ea typeface="Calibri"/>
+                <a:cs typeface="Calibri"/>
+                <a:sym typeface="Calibri"/>
+              </a:rPr>
+              <a:t>Given</a:t>
+            </a:r>
+          </a:p>
+          <a:p>
+            <a:pPr marL="285750" lvl="0" indent="-285750">
+              <a:buSzPts val="1100"/>
+              <a:buFont typeface="Arial" panose="020B0604020202020204" pitchFamily="34" charset="0"/>
+              <a:buChar char="•"/>
+            </a:pPr>
+            <a:r>
+              <a:rPr lang="en-US" dirty="0">
+                <a:solidFill>
+                  <a:schemeClr val="dk1"/>
+                </a:solidFill>
+                <a:latin typeface="Calibri"/>
+                <a:ea typeface="Calibri"/>
+                <a:cs typeface="Calibri"/>
+                <a:sym typeface="Calibri"/>
+              </a:rPr>
+              <a:t>null-hypothesis (value) </a:t>
+            </a:r>
+          </a:p>
+          <a:p>
+            <a:pPr marL="285750" lvl="0" indent="-285750">
+              <a:buSzPts val="1100"/>
+              <a:buFont typeface="Arial" panose="020B0604020202020204" pitchFamily="34" charset="0"/>
+              <a:buChar char="•"/>
+            </a:pPr>
+            <a:r>
+              <a:rPr lang="en-US" dirty="0">
+                <a:solidFill>
+                  <a:schemeClr val="dk1"/>
+                </a:solidFill>
+                <a:latin typeface="Calibri"/>
+                <a:ea typeface="Calibri"/>
+                <a:cs typeface="Calibri"/>
+                <a:sym typeface="Calibri"/>
+              </a:rPr>
+              <a:t>distribution</a:t>
+            </a:r>
+          </a:p>
+          <a:p>
+            <a:pPr marL="285750" lvl="0" indent="-285750">
+              <a:buSzPts val="1100"/>
+              <a:buFont typeface="Arial" panose="020B0604020202020204" pitchFamily="34" charset="0"/>
+              <a:buChar char="•"/>
+            </a:pPr>
+            <a:r>
+              <a:rPr lang="en-US" dirty="0">
+                <a:solidFill>
+                  <a:schemeClr val="dk1"/>
+                </a:solidFill>
+                <a:latin typeface="Calibri"/>
+                <a:ea typeface="Calibri"/>
+                <a:cs typeface="Calibri"/>
+                <a:sym typeface="Calibri"/>
+              </a:rPr>
+              <a:t>observed value</a:t>
+            </a:r>
+          </a:p>
+          <a:p>
+            <a:pPr lvl="0">
+              <a:buSzPts val="1100"/>
+            </a:pPr>
+            <a:r>
+              <a:rPr lang="en-US" dirty="0">
+                <a:solidFill>
+                  <a:schemeClr val="dk1"/>
+                </a:solidFill>
+                <a:latin typeface="Calibri"/>
+                <a:ea typeface="Calibri"/>
+                <a:cs typeface="Calibri"/>
+                <a:sym typeface="Calibri"/>
+              </a:rPr>
+              <a:t>Calculate the probability of getting the result "at least as extreme as observed". </a:t>
+            </a:r>
+            <a:endParaRPr lang="en-US" dirty="0"/>
+          </a:p>
+        </p:txBody>
+      </p:sp>
+      <p:sp>
+        <p:nvSpPr>
+          <p:cNvPr id="12" name="Google Shape;106;p15">
+            <a:extLst>
+              <a:ext uri="{FF2B5EF4-FFF2-40B4-BE49-F238E27FC236}">
+                <a16:creationId xmlns:a16="http://schemas.microsoft.com/office/drawing/2014/main" id="{2CE1448C-D3B8-B642-A081-FF386148205D}"/>
+              </a:ext>
+            </a:extLst>
+          </p:cNvPr>
+          <p:cNvSpPr txBox="1"/>
+          <p:nvPr/>
+        </p:nvSpPr>
+        <p:spPr>
+          <a:xfrm>
+            <a:off x="275109" y="754595"/>
+            <a:ext cx="6964298" cy="5845355"/>
+          </a:xfrm>
+          <a:prstGeom prst="rect">
+            <a:avLst/>
+          </a:prstGeom>
+          <a:noFill/>
+          <a:ln>
+            <a:noFill/>
+          </a:ln>
+        </p:spPr>
+        <p:txBody>
+          <a:bodyPr spcFirstLastPara="1" wrap="square" lIns="91425" tIns="45700" rIns="91425" bIns="45700" anchor="t" anchorCtr="0">
+            <a:noAutofit/>
+          </a:bodyPr>
+          <a:lstStyle/>
+          <a:p>
+            <a:pPr marL="0" marR="0" lvl="0" indent="0" algn="l" rtl="0">
+              <a:spcBef>
+                <a:spcPts val="0"/>
+              </a:spcBef>
+              <a:spcAft>
+                <a:spcPts val="0"/>
+              </a:spcAft>
+              <a:buSzPts val="1100"/>
+              <a:buNone/>
+            </a:pPr>
+            <a:r>
+              <a:rPr lang="en-US" dirty="0">
+                <a:solidFill>
+                  <a:schemeClr val="dk1"/>
+                </a:solidFill>
+                <a:latin typeface="Calibri"/>
+                <a:ea typeface="Calibri"/>
+                <a:cs typeface="Calibri"/>
+                <a:sym typeface="Calibri"/>
+              </a:rPr>
+              <a:t>A </a:t>
+            </a:r>
+            <a:r>
+              <a:rPr lang="en-US" b="1" dirty="0">
+                <a:solidFill>
+                  <a:srgbClr val="0000FF"/>
+                </a:solidFill>
+                <a:latin typeface="Calibri"/>
+                <a:ea typeface="Calibri"/>
+                <a:cs typeface="Calibri"/>
+                <a:sym typeface="Calibri"/>
+              </a:rPr>
+              <a:t>p-value</a:t>
+            </a:r>
+            <a:r>
+              <a:rPr lang="en-US" dirty="0">
+                <a:solidFill>
+                  <a:schemeClr val="dk1"/>
+                </a:solidFill>
+                <a:latin typeface="Calibri"/>
+                <a:ea typeface="Calibri"/>
+                <a:cs typeface="Calibri"/>
+                <a:sym typeface="Calibri"/>
+              </a:rPr>
+              <a:t> (probability value) is a probability </a:t>
+            </a:r>
+          </a:p>
+          <a:p>
+            <a:pPr marL="0" marR="0" lvl="0" indent="0" algn="l" rtl="0">
+              <a:spcBef>
+                <a:spcPts val="0"/>
+              </a:spcBef>
+              <a:spcAft>
+                <a:spcPts val="0"/>
+              </a:spcAft>
+              <a:buSzPts val="1100"/>
+              <a:buNone/>
+            </a:pPr>
+            <a:r>
+              <a:rPr lang="en-US" dirty="0">
+                <a:solidFill>
+                  <a:schemeClr val="dk1"/>
+                </a:solidFill>
+                <a:latin typeface="Calibri"/>
+                <a:ea typeface="Calibri"/>
+                <a:cs typeface="Calibri"/>
+                <a:sym typeface="Calibri"/>
+              </a:rPr>
+              <a:t>of getting results at least as extreme as observed. </a:t>
+            </a:r>
+          </a:p>
+          <a:p>
+            <a:pPr marL="0" marR="0" lvl="0" indent="0" algn="l" rtl="0">
+              <a:spcBef>
+                <a:spcPts val="0"/>
+              </a:spcBef>
+              <a:spcAft>
+                <a:spcPts val="0"/>
+              </a:spcAft>
+              <a:buSzPts val="1100"/>
+              <a:buNone/>
+            </a:pPr>
+            <a:br>
+              <a:rPr lang="en-US" dirty="0">
+                <a:solidFill>
+                  <a:schemeClr val="dk1"/>
+                </a:solidFill>
+                <a:latin typeface="Calibri"/>
+                <a:ea typeface="Calibri"/>
+                <a:cs typeface="Calibri"/>
+                <a:sym typeface="Calibri"/>
+              </a:rPr>
+            </a:br>
+            <a:r>
+              <a:rPr lang="en-US" dirty="0">
+                <a:solidFill>
+                  <a:srgbClr val="00B050"/>
+                </a:solidFill>
+                <a:latin typeface="Calibri"/>
+                <a:ea typeface="Calibri"/>
+                <a:cs typeface="Calibri"/>
+                <a:sym typeface="Calibri"/>
+              </a:rPr>
+              <a:t>We are given:</a:t>
+            </a:r>
+          </a:p>
+          <a:p>
+            <a:pPr marL="0" marR="0" lvl="0" indent="0" algn="l" rtl="0">
+              <a:spcBef>
+                <a:spcPts val="0"/>
+              </a:spcBef>
+              <a:spcAft>
+                <a:spcPts val="0"/>
+              </a:spcAft>
+              <a:buSzPts val="1100"/>
+              <a:buNone/>
+            </a:pPr>
+            <a:r>
+              <a:rPr lang="en-US" dirty="0">
+                <a:solidFill>
+                  <a:srgbClr val="00B050"/>
+                </a:solidFill>
+                <a:latin typeface="Calibri"/>
+                <a:ea typeface="Calibri"/>
+                <a:cs typeface="Calibri"/>
+                <a:sym typeface="Calibri"/>
+              </a:rPr>
+              <a:t>        1. A null-hypothesis (</a:t>
+            </a:r>
+            <a:r>
+              <a:rPr lang="en-US" b="1" dirty="0">
+                <a:solidFill>
+                  <a:srgbClr val="00B050"/>
+                </a:solidFill>
+                <a:latin typeface="Calibri"/>
+                <a:ea typeface="Calibri"/>
+                <a:cs typeface="Calibri"/>
+                <a:sym typeface="Calibri"/>
+              </a:rPr>
+              <a:t>value</a:t>
+            </a:r>
+            <a:r>
+              <a:rPr lang="en-US" dirty="0">
+                <a:solidFill>
+                  <a:srgbClr val="00B050"/>
+                </a:solidFill>
+                <a:latin typeface="Calibri"/>
+                <a:ea typeface="Calibri"/>
+                <a:cs typeface="Calibri"/>
+                <a:sym typeface="Calibri"/>
+              </a:rPr>
+              <a:t>)</a:t>
+            </a:r>
+          </a:p>
+          <a:p>
+            <a:pPr lvl="0">
+              <a:buSzPts val="1100"/>
+            </a:pPr>
+            <a:r>
+              <a:rPr lang="en-US" dirty="0">
+                <a:solidFill>
+                  <a:srgbClr val="00B050"/>
+                </a:solidFill>
+                <a:latin typeface="Calibri"/>
+                <a:ea typeface="Calibri"/>
+                <a:cs typeface="Calibri"/>
+                <a:sym typeface="Calibri"/>
+              </a:rPr>
+              <a:t>        2. A distribution: explicit or theoretical (</a:t>
+            </a:r>
+            <a:r>
+              <a:rPr lang="en-US" b="1" u="sng" dirty="0">
+                <a:solidFill>
+                  <a:srgbClr val="00B050"/>
+                </a:solidFill>
+                <a:latin typeface="Calibri"/>
+                <a:ea typeface="Calibri"/>
+                <a:cs typeface="Calibri"/>
+                <a:sym typeface="Calibri"/>
+              </a:rPr>
+              <a:t>reference</a:t>
+            </a:r>
+            <a:r>
+              <a:rPr lang="en-US" dirty="0">
+                <a:solidFill>
+                  <a:srgbClr val="00B050"/>
+                </a:solidFill>
+                <a:latin typeface="Calibri"/>
+                <a:ea typeface="Calibri"/>
+                <a:cs typeface="Calibri"/>
+                <a:sym typeface="Calibri"/>
+              </a:rPr>
+              <a:t>), or sample distribution (</a:t>
+            </a:r>
+            <a:r>
+              <a:rPr lang="en-US" b="1" u="sng" dirty="0">
+                <a:solidFill>
+                  <a:srgbClr val="00B050"/>
+                </a:solidFill>
+                <a:latin typeface="Calibri"/>
+                <a:ea typeface="Calibri"/>
+                <a:cs typeface="Calibri"/>
+                <a:sym typeface="Calibri"/>
+              </a:rPr>
+              <a:t>observed</a:t>
+            </a:r>
+            <a:r>
+              <a:rPr lang="en-US" dirty="0">
+                <a:solidFill>
+                  <a:srgbClr val="00B050"/>
+                </a:solidFill>
+                <a:latin typeface="Calibri"/>
+                <a:ea typeface="Calibri"/>
+                <a:cs typeface="Calibri"/>
+                <a:sym typeface="Calibri"/>
+              </a:rPr>
+              <a:t>).</a:t>
+            </a:r>
+            <a:br>
+              <a:rPr lang="en-US" dirty="0">
+                <a:solidFill>
+                  <a:srgbClr val="00B050"/>
+                </a:solidFill>
+                <a:latin typeface="Calibri"/>
+                <a:ea typeface="Calibri"/>
+                <a:cs typeface="Calibri"/>
+                <a:sym typeface="Calibri"/>
+              </a:rPr>
+            </a:br>
+            <a:r>
+              <a:rPr lang="en-US" dirty="0">
+                <a:solidFill>
+                  <a:srgbClr val="00B050"/>
+                </a:solidFill>
+                <a:latin typeface="Calibri"/>
+                <a:ea typeface="Calibri"/>
+                <a:cs typeface="Calibri"/>
+                <a:sym typeface="Calibri"/>
+              </a:rPr>
+              <a:t>             Most common distributions - Gaussian, t-Student, Chi-squared, F-, etc.</a:t>
+            </a:r>
+          </a:p>
+          <a:p>
+            <a:pPr lvl="0">
+              <a:buSzPts val="1100"/>
+            </a:pPr>
+            <a:r>
+              <a:rPr lang="en-US" dirty="0">
+                <a:solidFill>
+                  <a:srgbClr val="00B050"/>
+                </a:solidFill>
+                <a:latin typeface="Calibri"/>
+                <a:ea typeface="Calibri"/>
+                <a:cs typeface="Calibri"/>
+                <a:sym typeface="Calibri"/>
+              </a:rPr>
+              <a:t>        3. Observed </a:t>
+            </a:r>
+            <a:r>
+              <a:rPr lang="en-US" b="1" dirty="0">
+                <a:solidFill>
+                  <a:srgbClr val="00B050"/>
+                </a:solidFill>
+                <a:latin typeface="Calibri"/>
+                <a:ea typeface="Calibri"/>
+                <a:cs typeface="Calibri"/>
+                <a:sym typeface="Calibri"/>
+              </a:rPr>
+              <a:t>value</a:t>
+            </a:r>
+          </a:p>
+          <a:p>
+            <a:pPr lvl="0">
+              <a:buSzPts val="1100"/>
+            </a:pPr>
+            <a:endParaRPr lang="en-US" dirty="0">
+              <a:solidFill>
+                <a:srgbClr val="00B050"/>
+              </a:solidFill>
+              <a:latin typeface="Calibri"/>
+              <a:ea typeface="Calibri"/>
+              <a:cs typeface="Calibri"/>
+              <a:sym typeface="Calibri"/>
+            </a:endParaRPr>
+          </a:p>
+          <a:p>
+            <a:pPr lvl="0">
+              <a:buSzPts val="1100"/>
+            </a:pPr>
+            <a:r>
+              <a:rPr lang="en-US" dirty="0">
+                <a:solidFill>
+                  <a:srgbClr val="00B050"/>
+                </a:solidFill>
+                <a:latin typeface="Calibri"/>
+                <a:ea typeface="Calibri"/>
+                <a:cs typeface="Calibri"/>
+                <a:sym typeface="Calibri"/>
+              </a:rPr>
+              <a:t>From that we calculate the probability of getting a result "at least as extreme as observed" ?</a:t>
+            </a:r>
+          </a:p>
+          <a:p>
+            <a:pPr marL="0" marR="0" lvl="0" indent="0" algn="l" rtl="0">
+              <a:spcBef>
+                <a:spcPts val="0"/>
+              </a:spcBef>
+              <a:spcAft>
+                <a:spcPts val="0"/>
+              </a:spcAft>
+              <a:buSzPts val="1100"/>
+              <a:buNone/>
+            </a:pPr>
+            <a:endParaRPr lang="en-US" sz="800" dirty="0">
+              <a:solidFill>
+                <a:schemeClr val="dk1"/>
+              </a:solidFill>
+              <a:latin typeface="Calibri"/>
+              <a:ea typeface="Calibri"/>
+              <a:cs typeface="Calibri"/>
+              <a:sym typeface="Calibri"/>
+            </a:endParaRPr>
+          </a:p>
+          <a:p>
+            <a:pPr marL="0" marR="0" lvl="0" indent="0" algn="l" rtl="0">
+              <a:spcBef>
+                <a:spcPts val="0"/>
+              </a:spcBef>
+              <a:spcAft>
+                <a:spcPts val="0"/>
+              </a:spcAft>
+              <a:buSzPts val="1100"/>
+              <a:buNone/>
+            </a:pPr>
+            <a:endParaRPr lang="en-US" dirty="0">
+              <a:solidFill>
+                <a:schemeClr val="dk1"/>
+              </a:solidFill>
+              <a:latin typeface="Calibri"/>
+              <a:ea typeface="Calibri"/>
+              <a:cs typeface="Calibri"/>
+              <a:sym typeface="Calibri"/>
+            </a:endParaRPr>
+          </a:p>
+          <a:p>
+            <a:pPr marL="0" marR="0" lvl="0" indent="0" algn="l" rtl="0">
+              <a:spcBef>
+                <a:spcPts val="0"/>
+              </a:spcBef>
+              <a:spcAft>
+                <a:spcPts val="0"/>
+              </a:spcAft>
+              <a:buSzPts val="1100"/>
+              <a:buNone/>
+            </a:pPr>
+            <a:r>
+              <a:rPr lang="en-US" dirty="0">
+                <a:solidFill>
+                  <a:schemeClr val="dk1"/>
+                </a:solidFill>
+                <a:latin typeface="Calibri"/>
+                <a:ea typeface="Calibri"/>
+                <a:cs typeface="Calibri"/>
+                <a:sym typeface="Calibri"/>
+              </a:rPr>
+              <a:t>If this probability is very small, this means </a:t>
+            </a:r>
+          </a:p>
+          <a:p>
+            <a:pPr marL="0" marR="0" lvl="0" indent="0" algn="l" rtl="0">
+              <a:spcBef>
+                <a:spcPts val="0"/>
+              </a:spcBef>
+              <a:spcAft>
+                <a:spcPts val="0"/>
+              </a:spcAft>
+              <a:buSzPts val="1100"/>
+              <a:buNone/>
+            </a:pPr>
+            <a:r>
+              <a:rPr lang="en-US" dirty="0">
+                <a:solidFill>
+                  <a:schemeClr val="dk1"/>
+                </a:solidFill>
+                <a:latin typeface="Calibri"/>
+                <a:ea typeface="Calibri"/>
+                <a:cs typeface="Calibri"/>
+                <a:sym typeface="Calibri"/>
+              </a:rPr>
+              <a:t>that the result is unlikely to be explained by the null hypothesis.</a:t>
+            </a:r>
+          </a:p>
+          <a:p>
+            <a:pPr marL="0" marR="0" lvl="0" indent="0" algn="l" rtl="0">
+              <a:spcBef>
+                <a:spcPts val="0"/>
+              </a:spcBef>
+              <a:spcAft>
+                <a:spcPts val="0"/>
+              </a:spcAft>
+              <a:buSzPts val="1100"/>
+              <a:buNone/>
+            </a:pPr>
+            <a:r>
+              <a:rPr lang="en-US" dirty="0">
+                <a:solidFill>
+                  <a:schemeClr val="dk1"/>
+                </a:solidFill>
+                <a:latin typeface="Calibri"/>
+                <a:ea typeface="Calibri"/>
+                <a:cs typeface="Calibri"/>
+                <a:sym typeface="Calibri"/>
+              </a:rPr>
+              <a:t>So we reject the null hypothesis.</a:t>
+            </a:r>
+          </a:p>
+          <a:p>
+            <a:pPr marL="0" marR="0" lvl="0" indent="0" algn="l" rtl="0">
+              <a:spcBef>
+                <a:spcPts val="0"/>
+              </a:spcBef>
+              <a:spcAft>
+                <a:spcPts val="0"/>
+              </a:spcAft>
+              <a:buSzPts val="1100"/>
+              <a:buNone/>
+            </a:pPr>
+            <a:endParaRPr dirty="0">
+              <a:solidFill>
+                <a:schemeClr val="dk1"/>
+              </a:solidFill>
+              <a:latin typeface="Calibri"/>
+              <a:ea typeface="Calibri"/>
+              <a:cs typeface="Calibri"/>
+              <a:sym typeface="Calibri"/>
+            </a:endParaRPr>
+          </a:p>
+          <a:p>
+            <a:pPr marL="0" marR="0" lvl="0" indent="0" algn="l" rtl="0">
+              <a:spcBef>
+                <a:spcPts val="0"/>
+              </a:spcBef>
+              <a:spcAft>
+                <a:spcPts val="0"/>
+              </a:spcAft>
+              <a:buSzPts val="1100"/>
+              <a:buNone/>
+            </a:pPr>
+            <a:endParaRPr sz="800" dirty="0">
+              <a:solidFill>
+                <a:schemeClr val="dk1"/>
+              </a:solidFill>
+              <a:latin typeface="Calibri"/>
+              <a:ea typeface="Calibri"/>
+              <a:cs typeface="Calibri"/>
+              <a:sym typeface="Calibri"/>
+            </a:endParaRPr>
+          </a:p>
+          <a:p>
+            <a:pPr lvl="0">
+              <a:buSzPts val="1100"/>
+            </a:pPr>
+            <a:r>
+              <a:rPr lang="en-US" sz="1200" b="1" dirty="0">
+                <a:solidFill>
+                  <a:srgbClr val="0070C0"/>
+                </a:solidFill>
+                <a:latin typeface="Courier New"/>
+                <a:ea typeface="Courier New"/>
+                <a:cs typeface="Courier New"/>
+                <a:sym typeface="Courier New"/>
+              </a:rPr>
+              <a:t>            P-value    probability of observed</a:t>
+            </a:r>
+            <a:endParaRPr sz="1200" b="1" dirty="0">
+              <a:solidFill>
+                <a:srgbClr val="0070C0"/>
+              </a:solidFill>
+              <a:latin typeface="Courier New"/>
+              <a:ea typeface="Courier New"/>
+              <a:cs typeface="Courier New"/>
+              <a:sym typeface="Courier New"/>
+            </a:endParaRPr>
+          </a:p>
+          <a:p>
+            <a:pPr lvl="0">
+              <a:buSzPts val="1100"/>
+            </a:pPr>
+            <a:r>
+              <a:rPr lang="en-US" sz="1200" b="1" dirty="0">
+                <a:solidFill>
+                  <a:srgbClr val="0070C0"/>
+                </a:solidFill>
+                <a:latin typeface="Courier New"/>
+                <a:ea typeface="Courier New"/>
+                <a:cs typeface="Courier New"/>
+                <a:sym typeface="Courier New"/>
+              </a:rPr>
+              <a:t>            -------------------------------</a:t>
+            </a:r>
+            <a:endParaRPr sz="1200" b="1" dirty="0">
+              <a:solidFill>
+                <a:srgbClr val="0070C0"/>
+              </a:solidFill>
+              <a:latin typeface="Courier New"/>
+              <a:ea typeface="Courier New"/>
+              <a:cs typeface="Courier New"/>
+              <a:sym typeface="Courier New"/>
+            </a:endParaRPr>
+          </a:p>
+          <a:p>
+            <a:pPr lvl="0">
+              <a:buSzPts val="1100"/>
+            </a:pPr>
+            <a:r>
+              <a:rPr lang="en-US" sz="1200" b="1" dirty="0">
+                <a:solidFill>
+                  <a:srgbClr val="0070C0"/>
+                </a:solidFill>
+                <a:latin typeface="Courier New"/>
+                <a:ea typeface="Courier New"/>
+                <a:cs typeface="Courier New"/>
+                <a:sym typeface="Courier New"/>
+              </a:rPr>
+              <a:t>            P &lt; 0.05         5%</a:t>
+            </a:r>
+            <a:endParaRPr sz="1200" b="1" dirty="0">
+              <a:solidFill>
+                <a:srgbClr val="0070C0"/>
+              </a:solidFill>
+              <a:latin typeface="Courier New"/>
+              <a:ea typeface="Courier New"/>
+              <a:cs typeface="Courier New"/>
+              <a:sym typeface="Courier New"/>
+            </a:endParaRPr>
+          </a:p>
+          <a:p>
+            <a:pPr lvl="0">
+              <a:buSzPts val="1100"/>
+            </a:pPr>
+            <a:r>
+              <a:rPr lang="en-US" sz="1200" b="1" dirty="0">
+                <a:solidFill>
+                  <a:srgbClr val="0070C0"/>
+                </a:solidFill>
+                <a:latin typeface="Courier New"/>
+                <a:ea typeface="Courier New"/>
+                <a:cs typeface="Courier New"/>
+                <a:sym typeface="Courier New"/>
+              </a:rPr>
+              <a:t>            P &lt; 0.01         1%</a:t>
+            </a:r>
+            <a:endParaRPr sz="1200" b="1" dirty="0">
+              <a:solidFill>
+                <a:srgbClr val="0070C0"/>
+              </a:solidFill>
+              <a:latin typeface="Courier New"/>
+              <a:ea typeface="Courier New"/>
+              <a:cs typeface="Courier New"/>
+              <a:sym typeface="Courier New"/>
+            </a:endParaRPr>
+          </a:p>
+          <a:p>
+            <a:pPr lvl="0">
+              <a:buSzPts val="1100"/>
+            </a:pPr>
+            <a:r>
+              <a:rPr lang="en-US" sz="1200" b="1" dirty="0">
+                <a:solidFill>
+                  <a:srgbClr val="0070C0"/>
+                </a:solidFill>
+                <a:latin typeface="Courier New"/>
+                <a:ea typeface="Courier New"/>
+                <a:cs typeface="Courier New"/>
+                <a:sym typeface="Courier New"/>
+              </a:rPr>
+              <a:t>            p &lt; 0.001        0.1%</a:t>
+            </a:r>
+            <a:endParaRPr sz="1200" b="1" dirty="0">
+              <a:solidFill>
+                <a:srgbClr val="0070C0"/>
+              </a:solidFill>
+              <a:latin typeface="Courier New"/>
+              <a:ea typeface="Courier New"/>
+              <a:cs typeface="Courier New"/>
+              <a:sym typeface="Courier New"/>
+            </a:endParaRPr>
+          </a:p>
+          <a:p>
+            <a:pPr lvl="0">
+              <a:buSzPts val="1100"/>
+            </a:pPr>
+            <a:r>
+              <a:rPr lang="en-US" sz="1200" b="1" dirty="0">
+                <a:solidFill>
+                  <a:srgbClr val="0070C0"/>
+                </a:solidFill>
+                <a:latin typeface="Courier New"/>
+                <a:ea typeface="Courier New"/>
+                <a:cs typeface="Courier New"/>
+                <a:sym typeface="Courier New"/>
+              </a:rPr>
+              <a:t>            -------------------------------</a:t>
+            </a:r>
+            <a:endParaRPr sz="1200" dirty="0">
+              <a:solidFill>
+                <a:schemeClr val="dk1"/>
+              </a:solidFill>
+              <a:latin typeface="Calibri"/>
+              <a:ea typeface="Calibri"/>
+              <a:cs typeface="Calibri"/>
+              <a:sym typeface="Calibri"/>
+            </a:endParaRPr>
+          </a:p>
+          <a:p>
+            <a:pPr lvl="0">
+              <a:buSzPts val="1100"/>
+            </a:pPr>
+            <a:endParaRPr lang="en-US" dirty="0">
+              <a:solidFill>
+                <a:schemeClr val="dk1"/>
+              </a:solidFill>
+              <a:latin typeface="Calibri"/>
+              <a:ea typeface="Calibri"/>
+              <a:cs typeface="Calibri"/>
+              <a:sym typeface="Calibri"/>
+            </a:endParaRPr>
+          </a:p>
+          <a:p>
+            <a:pPr lvl="0">
+              <a:buSzPts val="1100"/>
+            </a:pPr>
+            <a:r>
+              <a:rPr lang="en-US" dirty="0">
+                <a:solidFill>
+                  <a:schemeClr val="dk1"/>
+                </a:solidFill>
+                <a:latin typeface="Calibri"/>
+                <a:ea typeface="Calibri"/>
+                <a:cs typeface="Calibri"/>
+                <a:sym typeface="Calibri"/>
+              </a:rPr>
+              <a:t>A small p-value (typically ≤ 0.05) indicates strong </a:t>
+            </a:r>
+          </a:p>
+          <a:p>
+            <a:pPr lvl="0">
+              <a:buSzPts val="1100"/>
+            </a:pPr>
+            <a:r>
+              <a:rPr lang="en-US" dirty="0">
+                <a:solidFill>
+                  <a:schemeClr val="dk1"/>
+                </a:solidFill>
+                <a:latin typeface="Calibri"/>
+                <a:ea typeface="Calibri"/>
+                <a:cs typeface="Calibri"/>
+                <a:sym typeface="Calibri"/>
+              </a:rPr>
+              <a:t>evidence </a:t>
+            </a:r>
+            <a:r>
+              <a:rPr lang="en-US" b="1" dirty="0">
+                <a:solidFill>
+                  <a:srgbClr val="FF0000"/>
+                </a:solidFill>
+                <a:latin typeface="Calibri"/>
+                <a:ea typeface="Calibri"/>
+                <a:cs typeface="Calibri"/>
+                <a:sym typeface="Calibri"/>
+              </a:rPr>
+              <a:t>against</a:t>
+            </a:r>
+            <a:r>
+              <a:rPr lang="en-US" dirty="0">
+                <a:solidFill>
+                  <a:schemeClr val="dk1"/>
+                </a:solidFill>
+                <a:latin typeface="Calibri"/>
+                <a:ea typeface="Calibri"/>
+                <a:cs typeface="Calibri"/>
+                <a:sym typeface="Calibri"/>
+              </a:rPr>
+              <a:t> the null hypothesis, </a:t>
+            </a:r>
+          </a:p>
+          <a:p>
+            <a:pPr lvl="0">
+              <a:buSzPts val="1100"/>
+            </a:pPr>
+            <a:r>
+              <a:rPr lang="en-US" dirty="0">
+                <a:solidFill>
+                  <a:schemeClr val="dk1"/>
+                </a:solidFill>
+                <a:latin typeface="Calibri"/>
+                <a:ea typeface="Calibri"/>
+                <a:cs typeface="Calibri"/>
+                <a:sym typeface="Calibri"/>
+              </a:rPr>
+              <a:t>so you reject the null hypothesis. </a:t>
+            </a:r>
+          </a:p>
+          <a:p>
+            <a:pPr lvl="0">
+              <a:buSzPts val="1100"/>
+            </a:pPr>
+            <a:r>
+              <a:rPr lang="en-US" dirty="0">
+                <a:solidFill>
+                  <a:schemeClr val="dk1"/>
+                </a:solidFill>
+                <a:latin typeface="Calibri"/>
+                <a:ea typeface="Calibri"/>
+                <a:cs typeface="Calibri"/>
+                <a:sym typeface="Calibri"/>
+              </a:rPr>
+              <a:t>People say that this evidence is "</a:t>
+            </a:r>
+            <a:r>
+              <a:rPr lang="en-US" b="1" dirty="0">
+                <a:solidFill>
+                  <a:srgbClr val="FF0000"/>
+                </a:solidFill>
+                <a:latin typeface="Calibri"/>
+                <a:ea typeface="Calibri"/>
+                <a:cs typeface="Calibri"/>
+                <a:sym typeface="Calibri"/>
+              </a:rPr>
+              <a:t>statistically significant</a:t>
+            </a:r>
+            <a:r>
+              <a:rPr lang="en-US" dirty="0">
+                <a:solidFill>
+                  <a:schemeClr val="dk1"/>
+                </a:solidFill>
+                <a:latin typeface="Calibri"/>
+                <a:ea typeface="Calibri"/>
+                <a:cs typeface="Calibri"/>
+                <a:sym typeface="Calibri"/>
+              </a:rPr>
+              <a:t>".</a:t>
+            </a:r>
+          </a:p>
+          <a:p>
+            <a:pPr marL="0" marR="0" lvl="0" indent="0" algn="l" rtl="0">
+              <a:spcBef>
+                <a:spcPts val="0"/>
+              </a:spcBef>
+              <a:spcAft>
+                <a:spcPts val="0"/>
+              </a:spcAft>
+              <a:buSzPts val="1100"/>
+              <a:buNone/>
+            </a:pPr>
+            <a:endParaRPr sz="800" dirty="0">
+              <a:solidFill>
+                <a:schemeClr val="dk1"/>
+              </a:solidFill>
+              <a:latin typeface="Calibri"/>
+              <a:ea typeface="Calibri"/>
+              <a:cs typeface="Calibri"/>
+              <a:sym typeface="Calibri"/>
+            </a:endParaRPr>
+          </a:p>
+          <a:p>
+            <a:pPr lvl="0">
+              <a:buSzPts val="1100"/>
+            </a:pPr>
+            <a:endParaRPr dirty="0">
+              <a:solidFill>
+                <a:schemeClr val="dk1"/>
+              </a:solidFill>
+              <a:latin typeface="Calibri"/>
+              <a:ea typeface="Calibri"/>
+              <a:cs typeface="Calibri"/>
+              <a:sym typeface="Calibri"/>
+            </a:endParaRPr>
+          </a:p>
+        </p:txBody>
+      </p:sp>
+    </p:spTree>
+  </p:cSld>
+  <p:clrMapOvr>
+    <a:masterClrMapping/>
+  </p:clrMapOvr>
+</p:sld>
+</file>
+
+<file path=ppt/slides/slide3.xml><?xml version="1.0" encoding="utf-8"?>
+<p:sld xmlns:a="http://schemas.openxmlformats.org/drawingml/2006/main" xmlns:r="http://schemas.openxmlformats.org/officeDocument/2006/relationships" xmlns:p="http://schemas.openxmlformats.org/presentationml/2006/main">
+  <p:cSld>
+    <p:spTree>
+      <p:nvGrpSpPr>
+        <p:cNvPr id="1" name="Shape 105"/>
+        <p:cNvGrpSpPr/>
+        <p:nvPr/>
+      </p:nvGrpSpPr>
+      <p:grpSpPr>
+        <a:xfrm>
+          <a:off x="0" y="0"/>
+          <a:ext cx="0" cy="0"/>
+          <a:chOff x="0" y="0"/>
+          <a:chExt cx="0" cy="0"/>
+        </a:xfrm>
+      </p:grpSpPr>
+      <p:sp>
+        <p:nvSpPr>
+          <p:cNvPr id="106" name="Google Shape;106;p15"/>
+          <p:cNvSpPr txBox="1"/>
+          <p:nvPr/>
+        </p:nvSpPr>
+        <p:spPr>
+          <a:xfrm>
+            <a:off x="202957" y="1394749"/>
+            <a:ext cx="6934114" cy="4068501"/>
+          </a:xfrm>
+          <a:prstGeom prst="rect">
+            <a:avLst/>
+          </a:prstGeom>
+          <a:noFill/>
+          <a:ln>
+            <a:noFill/>
+          </a:ln>
+        </p:spPr>
+        <p:txBody>
+          <a:bodyPr spcFirstLastPara="1" wrap="square" lIns="91425" tIns="45700" rIns="91425" bIns="45700" anchor="t" anchorCtr="0">
+            <a:noAutofit/>
+          </a:bodyPr>
+          <a:lstStyle/>
+          <a:p>
+            <a:pPr lvl="0">
+              <a:buSzPts val="1100"/>
+            </a:pPr>
+            <a:r>
+              <a:rPr lang="en-US" b="1" dirty="0">
+                <a:solidFill>
+                  <a:srgbClr val="0000FF"/>
+                </a:solidFill>
+                <a:latin typeface="Calibri"/>
+                <a:cs typeface="Calibri"/>
+              </a:rPr>
+              <a:t>Level of significance</a:t>
+            </a:r>
+            <a:r>
+              <a:rPr lang="en-US" dirty="0">
+                <a:solidFill>
+                  <a:schemeClr val="tx1"/>
+                </a:solidFill>
+                <a:latin typeface="Calibri"/>
+                <a:cs typeface="Calibri"/>
+              </a:rPr>
+              <a:t> (</a:t>
+            </a:r>
+            <a:r>
+              <a:rPr lang="en-US" b="1" dirty="0">
+                <a:solidFill>
+                  <a:srgbClr val="FF0000"/>
+                </a:solidFill>
+                <a:latin typeface="Calibri"/>
+                <a:cs typeface="Calibri"/>
+              </a:rPr>
+              <a:t>alpha</a:t>
+            </a:r>
+            <a:r>
+              <a:rPr lang="en-US" dirty="0">
+                <a:solidFill>
+                  <a:schemeClr val="tx1"/>
+                </a:solidFill>
+                <a:latin typeface="Calibri"/>
+                <a:cs typeface="Calibri"/>
+              </a:rPr>
+              <a:t> or </a:t>
+            </a:r>
+            <a:r>
+              <a:rPr lang="el-GR" b="1" dirty="0">
+                <a:solidFill>
+                  <a:srgbClr val="FF0000"/>
+                </a:solidFill>
+                <a:latin typeface="Calibri"/>
+                <a:cs typeface="Calibri"/>
+              </a:rPr>
+              <a:t>α</a:t>
+            </a:r>
+            <a:r>
+              <a:rPr lang="en-US" dirty="0">
+                <a:solidFill>
+                  <a:schemeClr val="tx1"/>
+                </a:solidFill>
+                <a:latin typeface="Calibri"/>
+                <a:cs typeface="Calibri"/>
+              </a:rPr>
+              <a:t>, typically 0.05) – </a:t>
+            </a:r>
+          </a:p>
+          <a:p>
+            <a:pPr lvl="0">
+              <a:buSzPts val="1100"/>
+            </a:pPr>
+            <a:r>
+              <a:rPr lang="en-US" dirty="0">
+                <a:solidFill>
+                  <a:schemeClr val="tx1"/>
+                </a:solidFill>
+                <a:latin typeface="Calibri"/>
+                <a:cs typeface="Calibri"/>
+              </a:rPr>
+              <a:t>probability that the event could have occurred by chance. </a:t>
+            </a:r>
+          </a:p>
+          <a:p>
+            <a:pPr lvl="0">
+              <a:buSzPts val="1100"/>
+            </a:pPr>
+            <a:endParaRPr dirty="0">
+              <a:solidFill>
+                <a:schemeClr val="dk1"/>
+              </a:solidFill>
+              <a:latin typeface="Calibri"/>
+              <a:ea typeface="Calibri"/>
+              <a:cs typeface="Calibri"/>
+              <a:sym typeface="Calibri"/>
+            </a:endParaRPr>
+          </a:p>
+          <a:p>
+            <a:pPr marL="0" marR="0" lvl="0" indent="0" algn="l" rtl="0">
+              <a:spcBef>
+                <a:spcPts val="0"/>
+              </a:spcBef>
+              <a:spcAft>
+                <a:spcPts val="0"/>
+              </a:spcAft>
+              <a:buSzPts val="1100"/>
+              <a:buNone/>
+            </a:pPr>
+            <a:r>
+              <a:rPr lang="en-US" b="1" dirty="0">
+                <a:solidFill>
+                  <a:srgbClr val="0000FF"/>
+                </a:solidFill>
+                <a:latin typeface="Calibri"/>
+                <a:ea typeface="Calibri"/>
+                <a:cs typeface="Calibri"/>
+                <a:sym typeface="Calibri"/>
+              </a:rPr>
+              <a:t>Confidence Interval (CI)</a:t>
+            </a:r>
+            <a:r>
+              <a:rPr lang="en-US" dirty="0">
+                <a:solidFill>
+                  <a:schemeClr val="dk1"/>
+                </a:solidFill>
+                <a:latin typeface="Calibri"/>
+                <a:ea typeface="Calibri"/>
+                <a:cs typeface="Calibri"/>
+                <a:sym typeface="Calibri"/>
+              </a:rPr>
+              <a:t>. A 95% CI is the interval that </a:t>
+            </a:r>
+          </a:p>
+          <a:p>
+            <a:pPr marL="0" marR="0" lvl="0" indent="0" algn="l" rtl="0">
+              <a:spcBef>
+                <a:spcPts val="0"/>
+              </a:spcBef>
+              <a:spcAft>
+                <a:spcPts val="0"/>
+              </a:spcAft>
+              <a:buSzPts val="1100"/>
+              <a:buNone/>
+            </a:pPr>
+            <a:r>
+              <a:rPr lang="en-US" dirty="0">
+                <a:solidFill>
+                  <a:schemeClr val="dk1"/>
+                </a:solidFill>
+                <a:latin typeface="Calibri"/>
+                <a:ea typeface="Calibri"/>
+                <a:cs typeface="Calibri"/>
+                <a:sym typeface="Calibri"/>
+              </a:rPr>
+              <a:t>you are 95% certain contains the true population value </a:t>
+            </a:r>
+          </a:p>
+          <a:p>
+            <a:pPr marL="0" marR="0" lvl="0" indent="0" algn="l" rtl="0">
+              <a:spcBef>
+                <a:spcPts val="0"/>
+              </a:spcBef>
+              <a:spcAft>
+                <a:spcPts val="0"/>
+              </a:spcAft>
+              <a:buSzPts val="1100"/>
+              <a:buNone/>
+            </a:pPr>
+            <a:r>
+              <a:rPr lang="en-US" dirty="0">
+                <a:solidFill>
+                  <a:schemeClr val="dk1"/>
+                </a:solidFill>
+                <a:latin typeface="Calibri"/>
+                <a:ea typeface="Calibri"/>
+                <a:cs typeface="Calibri"/>
+                <a:sym typeface="Calibri"/>
+              </a:rPr>
+              <a:t>as it might be estimated from a much larger study.</a:t>
+            </a:r>
+          </a:p>
+          <a:p>
+            <a:pPr>
+              <a:buSzPts val="1100"/>
+            </a:pPr>
+            <a:r>
+              <a:rPr lang="en-US" dirty="0">
+                <a:solidFill>
+                  <a:schemeClr val="dk1"/>
+                </a:solidFill>
+                <a:latin typeface="Calibri"/>
+                <a:ea typeface="Calibri"/>
+                <a:cs typeface="Calibri"/>
+                <a:sym typeface="Calibri"/>
+              </a:rPr>
+              <a:t> </a:t>
+            </a:r>
+            <a:r>
+              <a:rPr lang="en-US" dirty="0"/>
+              <a:t>- </a:t>
+            </a:r>
+            <a:r>
+              <a:rPr lang="en-US" dirty="0">
+                <a:hlinkClick r:id="rId3"/>
+              </a:rPr>
+              <a:t>https://en.wikipedia.org/wiki/Confidence_interval</a:t>
+            </a:r>
+            <a:r>
+              <a:rPr lang="en-US" dirty="0"/>
+              <a:t> </a:t>
+            </a:r>
+          </a:p>
+          <a:p>
+            <a:pPr marL="0" marR="0" lvl="0" indent="0" algn="l" rtl="0">
+              <a:spcBef>
+                <a:spcPts val="0"/>
+              </a:spcBef>
+              <a:spcAft>
+                <a:spcPts val="0"/>
+              </a:spcAft>
+              <a:buSzPts val="1100"/>
+              <a:buNone/>
+            </a:pPr>
+            <a:endParaRPr lang="en-US" dirty="0">
+              <a:solidFill>
+                <a:schemeClr val="dk1"/>
+              </a:solidFill>
+              <a:latin typeface="Calibri"/>
+              <a:ea typeface="Calibri"/>
+              <a:cs typeface="Calibri"/>
+              <a:sym typeface="Calibri"/>
+            </a:endParaRPr>
+          </a:p>
+          <a:p>
+            <a:pPr lvl="0">
+              <a:buSzPts val="1100"/>
+            </a:pPr>
+            <a:r>
+              <a:rPr lang="en-US" b="1" dirty="0">
+                <a:solidFill>
+                  <a:srgbClr val="0000FF"/>
+                </a:solidFill>
+                <a:latin typeface="Calibri"/>
+                <a:cs typeface="Calibri"/>
+                <a:sym typeface="Calibri"/>
+              </a:rPr>
+              <a:t>Critical Value</a:t>
+            </a:r>
+            <a:r>
+              <a:rPr lang="en-US" dirty="0">
+                <a:solidFill>
+                  <a:schemeClr val="dk1"/>
+                </a:solidFill>
+                <a:latin typeface="Calibri"/>
+                <a:cs typeface="Calibri"/>
+                <a:sym typeface="Calibri"/>
+              </a:rPr>
+              <a:t> - point on the distribution at which </a:t>
+            </a:r>
+          </a:p>
+          <a:p>
+            <a:pPr lvl="0">
+              <a:buSzPts val="1100"/>
+            </a:pPr>
+            <a:r>
+              <a:rPr lang="en-US" dirty="0">
+                <a:solidFill>
+                  <a:schemeClr val="dk1"/>
+                </a:solidFill>
+                <a:latin typeface="Calibri"/>
+                <a:cs typeface="Calibri"/>
+                <a:sym typeface="Calibri"/>
+              </a:rPr>
+              <a:t>we shift from "Fail to reject" to "Reject".</a:t>
+            </a:r>
+          </a:p>
+          <a:p>
+            <a:pPr marL="0" marR="0" lvl="0" indent="0" algn="l" rtl="0">
+              <a:spcBef>
+                <a:spcPts val="0"/>
+              </a:spcBef>
+              <a:spcAft>
+                <a:spcPts val="0"/>
+              </a:spcAft>
+              <a:buSzPts val="1100"/>
+              <a:buNone/>
+            </a:pPr>
+            <a:endParaRPr dirty="0">
+              <a:solidFill>
+                <a:schemeClr val="dk1"/>
+              </a:solidFill>
+              <a:latin typeface="Calibri"/>
+              <a:ea typeface="Calibri"/>
+              <a:cs typeface="Calibri"/>
+              <a:sym typeface="Calibri"/>
+            </a:endParaRPr>
+          </a:p>
+          <a:p>
+            <a:pPr marL="0" marR="0" lvl="0" indent="0" algn="l" rtl="0">
+              <a:spcBef>
+                <a:spcPts val="0"/>
+              </a:spcBef>
+              <a:spcAft>
+                <a:spcPts val="0"/>
+              </a:spcAft>
+              <a:buSzPts val="1100"/>
+              <a:buNone/>
+            </a:pPr>
+            <a:r>
+              <a:rPr lang="en-US" b="1" dirty="0">
+                <a:solidFill>
+                  <a:srgbClr val="0000FF"/>
+                </a:solidFill>
+                <a:latin typeface="Calibri"/>
+                <a:ea typeface="Calibri"/>
+                <a:cs typeface="Calibri"/>
+                <a:sym typeface="Calibri"/>
+              </a:rPr>
+              <a:t>z-score</a:t>
+            </a:r>
+            <a:r>
+              <a:rPr lang="en-US" dirty="0">
+                <a:solidFill>
+                  <a:schemeClr val="dk1"/>
+                </a:solidFill>
+                <a:latin typeface="Calibri"/>
+                <a:ea typeface="Calibri"/>
+                <a:cs typeface="Calibri"/>
+                <a:sym typeface="Calibri"/>
+              </a:rPr>
+              <a:t> is the distance from the mean </a:t>
+            </a:r>
+          </a:p>
+          <a:p>
+            <a:pPr marL="0" marR="0" lvl="0" indent="0" algn="l" rtl="0">
+              <a:spcBef>
+                <a:spcPts val="0"/>
+              </a:spcBef>
+              <a:spcAft>
+                <a:spcPts val="0"/>
+              </a:spcAft>
+              <a:buSzPts val="1100"/>
+              <a:buNone/>
+            </a:pPr>
+            <a:r>
+              <a:rPr lang="en-US" dirty="0">
+                <a:solidFill>
+                  <a:schemeClr val="dk1"/>
+                </a:solidFill>
+                <a:latin typeface="Calibri"/>
+                <a:ea typeface="Calibri"/>
+                <a:cs typeface="Calibri"/>
+                <a:sym typeface="Calibri"/>
+              </a:rPr>
+              <a:t>measured in the number of standard deviations.</a:t>
+            </a:r>
+          </a:p>
+          <a:p>
+            <a:pPr marL="0" marR="0" lvl="0" indent="0" algn="l" rtl="0">
+              <a:spcBef>
+                <a:spcPts val="0"/>
+              </a:spcBef>
+              <a:spcAft>
+                <a:spcPts val="0"/>
+              </a:spcAft>
+              <a:buSzPts val="1100"/>
+              <a:buNone/>
+            </a:pPr>
+            <a:endParaRPr lang="en-US" dirty="0">
+              <a:solidFill>
+                <a:schemeClr val="dk1"/>
+              </a:solidFill>
+              <a:latin typeface="Calibri"/>
+              <a:ea typeface="Calibri"/>
+              <a:cs typeface="Calibri"/>
+              <a:sym typeface="Calibri"/>
+            </a:endParaRPr>
+          </a:p>
+          <a:p>
+            <a:pPr lvl="0">
+              <a:buSzPts val="1100"/>
+            </a:pPr>
+            <a:r>
+              <a:rPr lang="en-US" b="1" dirty="0">
+                <a:solidFill>
+                  <a:srgbClr val="0000FF"/>
+                </a:solidFill>
+                <a:latin typeface="Calibri"/>
+                <a:cs typeface="Calibri"/>
+                <a:sym typeface="Calibri"/>
+              </a:rPr>
+              <a:t>Margin of Error </a:t>
+            </a:r>
+            <a:r>
+              <a:rPr lang="en-US" dirty="0">
+                <a:solidFill>
+                  <a:schemeClr val="dk1"/>
+                </a:solidFill>
+                <a:latin typeface="Calibri"/>
+                <a:ea typeface="Calibri"/>
+                <a:cs typeface="Calibri"/>
+                <a:sym typeface="Calibri"/>
+              </a:rPr>
+              <a:t>– amount of random sampling error in the results</a:t>
+            </a:r>
+          </a:p>
+          <a:p>
+            <a:pPr marL="0" marR="0" lvl="0" indent="0" algn="l" rtl="0">
+              <a:spcBef>
+                <a:spcPts val="0"/>
+              </a:spcBef>
+              <a:spcAft>
+                <a:spcPts val="0"/>
+              </a:spcAft>
+              <a:buSzPts val="1100"/>
+              <a:buNone/>
+            </a:pPr>
+            <a:r>
+              <a:rPr lang="en-US" sz="1200" dirty="0">
+                <a:solidFill>
+                  <a:schemeClr val="dk1"/>
+                </a:solidFill>
+                <a:latin typeface="Calibri"/>
+                <a:ea typeface="Calibri"/>
+                <a:cs typeface="Calibri"/>
+                <a:sym typeface="Calibri"/>
+              </a:rPr>
+              <a:t> - </a:t>
+            </a:r>
+            <a:r>
+              <a:rPr lang="en-US" sz="1200" dirty="0">
+                <a:solidFill>
+                  <a:schemeClr val="dk1"/>
+                </a:solidFill>
+                <a:latin typeface="Calibri"/>
+                <a:ea typeface="Calibri"/>
+                <a:cs typeface="Calibri"/>
+                <a:sym typeface="Calibri"/>
+                <a:hlinkClick r:id="rId4"/>
+              </a:rPr>
+              <a:t>https://en.wikipedia.org/wiki/Margin_of_error</a:t>
+            </a:r>
+            <a:endParaRPr lang="en-US" sz="1200" dirty="0">
+              <a:solidFill>
+                <a:schemeClr val="dk1"/>
+              </a:solidFill>
+              <a:latin typeface="Calibri"/>
+              <a:ea typeface="Calibri"/>
+              <a:cs typeface="Calibri"/>
+              <a:sym typeface="Calibri"/>
+            </a:endParaRPr>
+          </a:p>
+          <a:p>
+            <a:pPr lvl="0">
+              <a:buSzPts val="1100"/>
+            </a:pPr>
+            <a:r>
+              <a:rPr lang="en-US" sz="1200" dirty="0">
+                <a:solidFill>
+                  <a:schemeClr val="dk1"/>
+                </a:solidFill>
+                <a:latin typeface="Calibri"/>
+                <a:ea typeface="Calibri"/>
+                <a:cs typeface="Calibri"/>
+                <a:sym typeface="Calibri"/>
+              </a:rPr>
+              <a:t> - </a:t>
+            </a:r>
+            <a:r>
+              <a:rPr lang="en-US" sz="1200" dirty="0">
+                <a:solidFill>
+                  <a:schemeClr val="dk1"/>
+                </a:solidFill>
+                <a:latin typeface="Calibri"/>
+                <a:ea typeface="Calibri"/>
+                <a:cs typeface="Calibri"/>
+                <a:sym typeface="Calibri"/>
+                <a:hlinkClick r:id="rId5"/>
+              </a:rPr>
+              <a:t>https://www.surveymonkey.com/mp/margin-of-error-calculator/</a:t>
+            </a:r>
+            <a:r>
+              <a:rPr lang="en-US" sz="1200" dirty="0">
+                <a:solidFill>
+                  <a:schemeClr val="dk1"/>
+                </a:solidFill>
+                <a:latin typeface="Calibri"/>
+                <a:ea typeface="Calibri"/>
+                <a:cs typeface="Calibri"/>
+                <a:sym typeface="Calibri"/>
+              </a:rPr>
+              <a:t> </a:t>
+            </a:r>
+          </a:p>
+          <a:p>
+            <a:pPr lvl="0">
+              <a:buSzPts val="1100"/>
+            </a:pPr>
+            <a:r>
+              <a:rPr lang="en-US" sz="1200" dirty="0">
+                <a:solidFill>
+                  <a:schemeClr val="dk1"/>
+                </a:solidFill>
+                <a:latin typeface="Calibri"/>
+                <a:ea typeface="Calibri"/>
+                <a:cs typeface="Calibri"/>
+                <a:sym typeface="Calibri"/>
+              </a:rPr>
+              <a:t> - </a:t>
+            </a:r>
+            <a:r>
+              <a:rPr lang="en-US" sz="1200" dirty="0">
+                <a:solidFill>
+                  <a:schemeClr val="dk1"/>
+                </a:solidFill>
+                <a:latin typeface="Calibri"/>
+                <a:ea typeface="Calibri"/>
+                <a:cs typeface="Calibri"/>
+                <a:sym typeface="Calibri"/>
+                <a:hlinkClick r:id="rId6"/>
+              </a:rPr>
+              <a:t>https://www.dummies.com/education/math/statistics/how-sample-size-affects-the-margin-of-error/</a:t>
+            </a:r>
+            <a:r>
+              <a:rPr lang="en-US" sz="1200" dirty="0">
+                <a:solidFill>
+                  <a:schemeClr val="dk1"/>
+                </a:solidFill>
+                <a:latin typeface="Calibri"/>
+                <a:ea typeface="Calibri"/>
+                <a:cs typeface="Calibri"/>
+                <a:sym typeface="Calibri"/>
+              </a:rPr>
+              <a:t> </a:t>
+            </a:r>
+          </a:p>
+          <a:p>
+            <a:pPr lvl="0">
+              <a:buSzPts val="1100"/>
+            </a:pPr>
+            <a:endParaRPr dirty="0">
+              <a:solidFill>
+                <a:schemeClr val="dk1"/>
+              </a:solidFill>
+              <a:latin typeface="Calibri"/>
+              <a:ea typeface="Calibri"/>
+              <a:cs typeface="Calibri"/>
+              <a:sym typeface="Calibri"/>
+            </a:endParaRPr>
+          </a:p>
+        </p:txBody>
+      </p:sp>
+      <p:sp>
+        <p:nvSpPr>
+          <p:cNvPr id="11" name="Google Shape;106;p15">
+            <a:extLst>
+              <a:ext uri="{FF2B5EF4-FFF2-40B4-BE49-F238E27FC236}">
+                <a16:creationId xmlns:a16="http://schemas.microsoft.com/office/drawing/2014/main" id="{42C5FB0F-C4C7-4240-9D50-49391168D970}"/>
+              </a:ext>
+            </a:extLst>
+          </p:cNvPr>
+          <p:cNvSpPr txBox="1"/>
+          <p:nvPr/>
+        </p:nvSpPr>
+        <p:spPr>
+          <a:xfrm>
+            <a:off x="0" y="0"/>
+            <a:ext cx="5893043" cy="486121"/>
+          </a:xfrm>
+          <a:prstGeom prst="rect">
+            <a:avLst/>
+          </a:prstGeom>
+          <a:noFill/>
+          <a:ln>
+            <a:noFill/>
+          </a:ln>
+        </p:spPr>
+        <p:txBody>
+          <a:bodyPr spcFirstLastPara="1" wrap="square" lIns="91425" tIns="45700" rIns="91425" bIns="45700" anchor="t" anchorCtr="0">
+            <a:noAutofit/>
+          </a:bodyPr>
+          <a:lstStyle/>
+          <a:p>
+            <a:pPr marL="0" marR="0" lvl="0" indent="0" algn="l" rtl="0">
+              <a:spcBef>
+                <a:spcPts val="0"/>
+              </a:spcBef>
+              <a:spcAft>
+                <a:spcPts val="0"/>
+              </a:spcAft>
+              <a:buNone/>
+            </a:pPr>
+            <a:r>
+              <a:rPr lang="en-US" sz="2800" b="1" dirty="0">
+                <a:solidFill>
+                  <a:schemeClr val="dk1"/>
+                </a:solidFill>
+                <a:latin typeface="Calibri"/>
+                <a:ea typeface="Calibri"/>
+                <a:cs typeface="Calibri"/>
+                <a:sym typeface="Calibri"/>
+              </a:rPr>
+              <a:t>p-value &amp; null hypothesis - continued</a:t>
+            </a:r>
+            <a:endParaRPr sz="2800" b="1" dirty="0">
+              <a:solidFill>
+                <a:schemeClr val="dk1"/>
+              </a:solidFill>
+              <a:latin typeface="Calibri"/>
+              <a:ea typeface="Calibri"/>
+              <a:cs typeface="Calibri"/>
+              <a:sym typeface="Calibri"/>
+            </a:endParaRPr>
+          </a:p>
+          <a:p>
+            <a:pPr lvl="0">
+              <a:buSzPts val="1100"/>
+            </a:pPr>
+            <a:endParaRPr dirty="0">
+              <a:solidFill>
+                <a:schemeClr val="dk1"/>
+              </a:solidFill>
+              <a:latin typeface="Calibri"/>
+              <a:ea typeface="Calibri"/>
+              <a:cs typeface="Calibri"/>
+              <a:sym typeface="Calibri"/>
+            </a:endParaRPr>
+          </a:p>
+        </p:txBody>
+      </p:sp>
+      <p:pic>
+        <p:nvPicPr>
+          <p:cNvPr id="1028" name="Picture 4">
+            <a:extLst>
+              <a:ext uri="{FF2B5EF4-FFF2-40B4-BE49-F238E27FC236}">
+                <a16:creationId xmlns:a16="http://schemas.microsoft.com/office/drawing/2014/main" id="{B897F46F-4E04-0A40-B03C-D20DF5E3E1D2}"/>
+              </a:ext>
+            </a:extLst>
+          </p:cNvPr>
+          <p:cNvPicPr>
+            <a:picLocks noChangeAspect="1" noChangeArrowheads="1"/>
+          </p:cNvPicPr>
+          <p:nvPr/>
+        </p:nvPicPr>
+        <p:blipFill>
+          <a:blip r:embed="rId7" cstate="email">
+            <a:extLst>
+              <a:ext uri="{28A0092B-C50C-407E-A947-70E740481C1C}">
+                <a14:useLocalDpi xmlns:a14="http://schemas.microsoft.com/office/drawing/2010/main"/>
+              </a:ext>
+            </a:extLst>
+          </a:blip>
+          <a:srcRect/>
+          <a:stretch>
+            <a:fillRect/>
+          </a:stretch>
+        </p:blipFill>
+        <p:spPr bwMode="auto">
+          <a:xfrm>
+            <a:off x="7311589" y="1572879"/>
+            <a:ext cx="4880411" cy="3486009"/>
+          </a:xfrm>
+          <a:prstGeom prst="rect">
+            <a:avLst/>
+          </a:prstGeom>
+          <a:noFill/>
+          <a:extLst>
+            <a:ext uri="{909E8E84-426E-40DD-AFC4-6F175D3DCCD1}">
+              <a14:hiddenFill xmlns:a14="http://schemas.microsoft.com/office/drawing/2010/main">
+                <a:solidFill>
+                  <a:srgbClr val="FFFFFF"/>
+                </a:solidFill>
+              </a14:hiddenFill>
+            </a:ext>
+          </a:extLst>
+        </p:spPr>
+      </p:pic>
+      <p:sp>
+        <p:nvSpPr>
+          <p:cNvPr id="4" name="TextBox 3">
+            <a:extLst>
+              <a:ext uri="{FF2B5EF4-FFF2-40B4-BE49-F238E27FC236}">
+                <a16:creationId xmlns:a16="http://schemas.microsoft.com/office/drawing/2014/main" id="{A9134AC6-C3A4-CC44-90D3-E9F229529F13}"/>
+              </a:ext>
+            </a:extLst>
+          </p:cNvPr>
+          <p:cNvSpPr txBox="1"/>
+          <p:nvPr/>
+        </p:nvSpPr>
+        <p:spPr>
+          <a:xfrm>
+            <a:off x="9294592" y="4990310"/>
+            <a:ext cx="985653" cy="461665"/>
+          </a:xfrm>
+          <a:prstGeom prst="rect">
+            <a:avLst/>
+          </a:prstGeom>
+          <a:noFill/>
+        </p:spPr>
+        <p:txBody>
+          <a:bodyPr wrap="square" rtlCol="0">
+            <a:spAutoFit/>
+          </a:bodyPr>
+          <a:lstStyle/>
+          <a:p>
+            <a:pPr algn="ctr"/>
+            <a:r>
+              <a:rPr lang="en-US" sz="1200" dirty="0">
+                <a:solidFill>
+                  <a:srgbClr val="0070C0"/>
+                </a:solidFill>
+              </a:rPr>
+              <a:t>Confidence Interval</a:t>
+            </a:r>
+          </a:p>
+        </p:txBody>
+      </p:sp>
+      <p:sp>
+        <p:nvSpPr>
+          <p:cNvPr id="15" name="TextBox 14">
+            <a:extLst>
+              <a:ext uri="{FF2B5EF4-FFF2-40B4-BE49-F238E27FC236}">
+                <a16:creationId xmlns:a16="http://schemas.microsoft.com/office/drawing/2014/main" id="{918A6FD3-4C88-3242-83A2-D7AEFF1E9705}"/>
+              </a:ext>
+            </a:extLst>
+          </p:cNvPr>
+          <p:cNvSpPr txBox="1"/>
+          <p:nvPr/>
+        </p:nvSpPr>
+        <p:spPr>
+          <a:xfrm>
+            <a:off x="10903614" y="4990309"/>
+            <a:ext cx="665016" cy="461665"/>
+          </a:xfrm>
+          <a:prstGeom prst="rect">
+            <a:avLst/>
+          </a:prstGeom>
+          <a:noFill/>
+        </p:spPr>
+        <p:txBody>
+          <a:bodyPr wrap="square" rtlCol="0">
+            <a:spAutoFit/>
+          </a:bodyPr>
+          <a:lstStyle/>
+          <a:p>
+            <a:pPr algn="ctr"/>
+            <a:r>
+              <a:rPr lang="en-US" sz="1200" dirty="0">
+                <a:solidFill>
+                  <a:srgbClr val="0070C0"/>
+                </a:solidFill>
+              </a:rPr>
+              <a:t>Critical Region</a:t>
+            </a:r>
+          </a:p>
+        </p:txBody>
+      </p:sp>
+      <p:sp>
+        <p:nvSpPr>
+          <p:cNvPr id="16" name="TextBox 15">
+            <a:extLst>
+              <a:ext uri="{FF2B5EF4-FFF2-40B4-BE49-F238E27FC236}">
+                <a16:creationId xmlns:a16="http://schemas.microsoft.com/office/drawing/2014/main" id="{4AD1A45B-315F-6045-AC9A-784CD060989C}"/>
+              </a:ext>
+            </a:extLst>
+          </p:cNvPr>
+          <p:cNvSpPr txBox="1"/>
+          <p:nvPr/>
+        </p:nvSpPr>
+        <p:spPr>
+          <a:xfrm>
+            <a:off x="8061800" y="4990309"/>
+            <a:ext cx="665016" cy="461665"/>
+          </a:xfrm>
+          <a:prstGeom prst="rect">
+            <a:avLst/>
+          </a:prstGeom>
+          <a:noFill/>
+        </p:spPr>
+        <p:txBody>
+          <a:bodyPr wrap="square" rtlCol="0">
+            <a:spAutoFit/>
+          </a:bodyPr>
+          <a:lstStyle/>
+          <a:p>
+            <a:pPr algn="ctr"/>
+            <a:r>
+              <a:rPr lang="en-US" sz="1200" dirty="0">
+                <a:solidFill>
+                  <a:srgbClr val="0070C0"/>
+                </a:solidFill>
+              </a:rPr>
+              <a:t>Critical Region</a:t>
+            </a:r>
+          </a:p>
+        </p:txBody>
+      </p:sp>
+      <p:sp>
+        <p:nvSpPr>
+          <p:cNvPr id="2" name="TextBox 1">
+            <a:extLst>
+              <a:ext uri="{FF2B5EF4-FFF2-40B4-BE49-F238E27FC236}">
+                <a16:creationId xmlns:a16="http://schemas.microsoft.com/office/drawing/2014/main" id="{6CCBE7CE-67B9-FAE7-CE4B-83BD55B366C4}"/>
+              </a:ext>
+            </a:extLst>
+          </p:cNvPr>
+          <p:cNvSpPr txBox="1"/>
+          <p:nvPr/>
+        </p:nvSpPr>
+        <p:spPr>
+          <a:xfrm>
+            <a:off x="366230" y="5463250"/>
+            <a:ext cx="6384489" cy="523220"/>
+          </a:xfrm>
+          <a:prstGeom prst="rect">
+            <a:avLst/>
+          </a:prstGeom>
+          <a:noFill/>
+        </p:spPr>
+        <p:txBody>
+          <a:bodyPr wrap="square" rtlCol="0">
+            <a:spAutoFit/>
+          </a:bodyPr>
+          <a:lstStyle/>
+          <a:p>
+            <a:pPr marL="285750" indent="-285750">
+              <a:buFont typeface="Arial" panose="020B0604020202020204" pitchFamily="34" charset="0"/>
+              <a:buChar char="•"/>
+            </a:pPr>
+            <a:r>
+              <a:rPr lang="en-US">
+                <a:latin typeface="Calibri" panose="020F0502020204030204" pitchFamily="34" charset="0"/>
+                <a:cs typeface="Calibri" panose="020F0502020204030204" pitchFamily="34" charset="0"/>
+              </a:rPr>
+              <a:t>sample size and margin of error have an inverse relationship</a:t>
+            </a:r>
+          </a:p>
+          <a:p>
+            <a:pPr marL="285750" indent="-285750">
+              <a:buFont typeface="Arial" panose="020B0604020202020204" pitchFamily="34" charset="0"/>
+              <a:buChar char="•"/>
+            </a:pPr>
+            <a:r>
+              <a:rPr lang="en-US">
+                <a:latin typeface="Calibri" panose="020F0502020204030204" pitchFamily="34" charset="0"/>
+                <a:cs typeface="Calibri" panose="020F0502020204030204" pitchFamily="34" charset="0"/>
+              </a:rPr>
+              <a:t>after a point, further increasing the sample size gives you a diminished return</a:t>
+            </a:r>
+          </a:p>
+        </p:txBody>
+      </p:sp>
+    </p:spTree>
+    <p:extLst>
+      <p:ext uri="{BB962C8B-B14F-4D97-AF65-F5344CB8AC3E}">
+        <p14:creationId xmlns:p14="http://schemas.microsoft.com/office/powerpoint/2010/main" val="1243422980"/>
+      </p:ext>
+    </p:extLst>
+  </p:cSld>
+  <p:clrMapOvr>
+    <a:masterClrMapping/>
+  </p:clrMapOvr>
+</p:sld>
+</file>
+
+<file path=ppt/slides/slide4.xml><?xml version="1.0" encoding="utf-8"?>
+<p:sld xmlns:a="http://schemas.openxmlformats.org/drawingml/2006/main" xmlns:r="http://schemas.openxmlformats.org/officeDocument/2006/relationships" xmlns:p="http://schemas.openxmlformats.org/presentationml/2006/main">
+  <p:cSld>
+    <p:spTree>
+      <p:nvGrpSpPr>
         <p:cNvPr id="1" name=""/>
         <p:cNvGrpSpPr/>
         <p:nvPr/>
@@ -23081,7 +25261,7 @@
 </p:sld>
 </file>
 
-<file path=ppt/slides/slide3.xml><?xml version="1.0" encoding="utf-8"?>
+<file path=ppt/slides/slide5.xml><?xml version="1.0" encoding="utf-8"?>
 <p:sld xmlns:a="http://schemas.openxmlformats.org/drawingml/2006/main" xmlns:r="http://schemas.openxmlformats.org/officeDocument/2006/relationships" xmlns:p="http://schemas.openxmlformats.org/presentationml/2006/main">
   <p:cSld>
     <p:spTree>
@@ -23906,7 +26086,7 @@
 </p:sld>
 </file>
 
-<file path=ppt/slides/slide4.xml><?xml version="1.0" encoding="utf-8"?>
+<file path=ppt/slides/slide6.xml><?xml version="1.0" encoding="utf-8"?>
 <p:sld xmlns:a="http://schemas.openxmlformats.org/drawingml/2006/main" xmlns:r="http://schemas.openxmlformats.org/officeDocument/2006/relationships" xmlns:p="http://schemas.openxmlformats.org/presentationml/2006/main">
   <p:cSld>
     <p:spTree>
@@ -25008,2186 +27188,6 @@
     <p:extLst>
       <p:ext uri="{BB962C8B-B14F-4D97-AF65-F5344CB8AC3E}">
         <p14:creationId xmlns:p14="http://schemas.microsoft.com/office/powerpoint/2010/main" val="895390506"/>
-      </p:ext>
-    </p:extLst>
-  </p:cSld>
-  <p:clrMapOvr>
-    <a:masterClrMapping/>
-  </p:clrMapOvr>
-</p:sld>
-</file>
-
-<file path=ppt/slides/slide5.xml><?xml version="1.0" encoding="utf-8"?>
-<p:sld xmlns:a="http://schemas.openxmlformats.org/drawingml/2006/main" xmlns:r="http://schemas.openxmlformats.org/officeDocument/2006/relationships" xmlns:p="http://schemas.openxmlformats.org/presentationml/2006/main">
-  <p:cSld>
-    <p:spTree>
-      <p:nvGrpSpPr>
-        <p:cNvPr id="1" name="Shape 105"/>
-        <p:cNvGrpSpPr/>
-        <p:nvPr/>
-      </p:nvGrpSpPr>
-      <p:grpSpPr>
-        <a:xfrm>
-          <a:off x="0" y="0"/>
-          <a:ext cx="0" cy="0"/>
-          <a:chOff x="0" y="0"/>
-          <a:chExt cx="0" cy="0"/>
-        </a:xfrm>
-      </p:grpSpPr>
-      <p:sp>
-        <p:nvSpPr>
-          <p:cNvPr id="106" name="Google Shape;106;p15"/>
-          <p:cNvSpPr txBox="1"/>
-          <p:nvPr/>
-        </p:nvSpPr>
-        <p:spPr>
-          <a:xfrm>
-            <a:off x="1" y="0"/>
-            <a:ext cx="4263242" cy="486121"/>
-          </a:xfrm>
-          <a:prstGeom prst="rect">
-            <a:avLst/>
-          </a:prstGeom>
-          <a:noFill/>
-          <a:ln>
-            <a:noFill/>
-          </a:ln>
-        </p:spPr>
-        <p:txBody>
-          <a:bodyPr spcFirstLastPara="1" wrap="square" lIns="91425" tIns="45700" rIns="91425" bIns="45700" anchor="t" anchorCtr="0">
-            <a:noAutofit/>
-          </a:bodyPr>
-          <a:lstStyle/>
-          <a:p>
-            <a:pPr marL="0" marR="0" lvl="0" indent="0" algn="l" rtl="0">
-              <a:spcBef>
-                <a:spcPts val="0"/>
-              </a:spcBef>
-              <a:spcAft>
-                <a:spcPts val="0"/>
-              </a:spcAft>
-              <a:buNone/>
-            </a:pPr>
-            <a:r>
-              <a:rPr lang="en-US" sz="2800" b="1" dirty="0">
-                <a:solidFill>
-                  <a:schemeClr val="dk1"/>
-                </a:solidFill>
-                <a:latin typeface="Calibri"/>
-                <a:ea typeface="Calibri"/>
-                <a:cs typeface="Calibri"/>
-                <a:sym typeface="Calibri"/>
-              </a:rPr>
-              <a:t>p-value &amp; null hypothesis</a:t>
-            </a:r>
-            <a:endParaRPr sz="2800" b="1" dirty="0">
-              <a:solidFill>
-                <a:schemeClr val="dk1"/>
-              </a:solidFill>
-              <a:latin typeface="Calibri"/>
-              <a:ea typeface="Calibri"/>
-              <a:cs typeface="Calibri"/>
-              <a:sym typeface="Calibri"/>
-            </a:endParaRPr>
-          </a:p>
-          <a:p>
-            <a:pPr lvl="0">
-              <a:buSzPts val="1100"/>
-            </a:pPr>
-            <a:endParaRPr dirty="0">
-              <a:solidFill>
-                <a:schemeClr val="dk1"/>
-              </a:solidFill>
-              <a:latin typeface="Calibri"/>
-              <a:ea typeface="Calibri"/>
-              <a:cs typeface="Calibri"/>
-              <a:sym typeface="Calibri"/>
-            </a:endParaRPr>
-          </a:p>
-        </p:txBody>
-      </p:sp>
-      <p:pic>
-        <p:nvPicPr>
-          <p:cNvPr id="107" name="Google Shape;107;p15"/>
-          <p:cNvPicPr preferRelativeResize="0"/>
-          <p:nvPr/>
-        </p:nvPicPr>
-        <p:blipFill rotWithShape="1">
-          <a:blip r:embed="rId3" cstate="email">
-            <a:alphaModFix/>
-            <a:extLst>
-              <a:ext uri="{28A0092B-C50C-407E-A947-70E740481C1C}">
-                <a14:useLocalDpi xmlns:a14="http://schemas.microsoft.com/office/drawing/2010/main"/>
-              </a:ext>
-            </a:extLst>
-          </a:blip>
-          <a:srcRect/>
-          <a:stretch/>
-        </p:blipFill>
-        <p:spPr>
-          <a:xfrm>
-            <a:off x="8085329" y="3040632"/>
-            <a:ext cx="4011671" cy="1803299"/>
-          </a:xfrm>
-          <a:prstGeom prst="rect">
-            <a:avLst/>
-          </a:prstGeom>
-          <a:noFill/>
-          <a:ln>
-            <a:noFill/>
-          </a:ln>
-        </p:spPr>
-      </p:pic>
-      <p:pic>
-        <p:nvPicPr>
-          <p:cNvPr id="6" name="Picture 4" descr="t-test">
-            <a:extLst>
-              <a:ext uri="{FF2B5EF4-FFF2-40B4-BE49-F238E27FC236}">
-                <a16:creationId xmlns:a16="http://schemas.microsoft.com/office/drawing/2014/main" id="{7E958396-6F7B-D340-AA10-24FB8F70B9D9}"/>
-              </a:ext>
-            </a:extLst>
-          </p:cNvPr>
-          <p:cNvPicPr>
-            <a:picLocks noChangeAspect="1" noChangeArrowheads="1"/>
-          </p:cNvPicPr>
-          <p:nvPr/>
-        </p:nvPicPr>
-        <p:blipFill>
-          <a:blip r:embed="rId4">
-            <a:extLst>
-              <a:ext uri="{28A0092B-C50C-407E-A947-70E740481C1C}">
-                <a14:useLocalDpi xmlns:a14="http://schemas.microsoft.com/office/drawing/2010/main"/>
-              </a:ext>
-            </a:extLst>
-          </a:blip>
-          <a:srcRect/>
-          <a:stretch>
-            <a:fillRect/>
-          </a:stretch>
-        </p:blipFill>
-        <p:spPr bwMode="auto">
-          <a:xfrm>
-            <a:off x="8027719" y="486121"/>
-            <a:ext cx="3906187" cy="1409700"/>
-          </a:xfrm>
-          <a:prstGeom prst="rect">
-            <a:avLst/>
-          </a:prstGeom>
-          <a:noFill/>
-          <a:extLst>
-            <a:ext uri="{909E8E84-426E-40DD-AFC4-6F175D3DCCD1}">
-              <a14:hiddenFill xmlns:a14="http://schemas.microsoft.com/office/drawing/2010/main">
-                <a:solidFill>
-                  <a:srgbClr val="FFFFFF"/>
-                </a:solidFill>
-              </a14:hiddenFill>
-            </a:ext>
-          </a:extLst>
-        </p:spPr>
-      </p:pic>
-      <p:sp>
-        <p:nvSpPr>
-          <p:cNvPr id="2" name="TextBox 1">
-            <a:extLst>
-              <a:ext uri="{FF2B5EF4-FFF2-40B4-BE49-F238E27FC236}">
-                <a16:creationId xmlns:a16="http://schemas.microsoft.com/office/drawing/2014/main" id="{70594850-71C2-C441-B6EC-51C01281A53B}"/>
-              </a:ext>
-            </a:extLst>
-          </p:cNvPr>
-          <p:cNvSpPr txBox="1"/>
-          <p:nvPr/>
-        </p:nvSpPr>
-        <p:spPr>
-          <a:xfrm>
-            <a:off x="8763988" y="1998434"/>
-            <a:ext cx="1365662" cy="461665"/>
-          </a:xfrm>
-          <a:prstGeom prst="rect">
-            <a:avLst/>
-          </a:prstGeom>
-          <a:noFill/>
-        </p:spPr>
-        <p:txBody>
-          <a:bodyPr wrap="square" rtlCol="0">
-            <a:spAutoFit/>
-          </a:bodyPr>
-          <a:lstStyle/>
-          <a:p>
-            <a:pPr algn="ctr"/>
-            <a:r>
-              <a:rPr lang="en-US" sz="1200" dirty="0"/>
-              <a:t>reference value</a:t>
-            </a:r>
-          </a:p>
-          <a:p>
-            <a:pPr algn="ctr"/>
-            <a:r>
-              <a:rPr lang="en-US" sz="1200" dirty="0"/>
-              <a:t>(Null Hypothesis)</a:t>
-            </a:r>
-          </a:p>
-        </p:txBody>
-      </p:sp>
-      <p:sp>
-        <p:nvSpPr>
-          <p:cNvPr id="8" name="TextBox 7">
-            <a:extLst>
-              <a:ext uri="{FF2B5EF4-FFF2-40B4-BE49-F238E27FC236}">
-                <a16:creationId xmlns:a16="http://schemas.microsoft.com/office/drawing/2014/main" id="{28796D1A-93C2-EC49-99D3-79EDEEBF5566}"/>
-              </a:ext>
-            </a:extLst>
-          </p:cNvPr>
-          <p:cNvSpPr txBox="1"/>
-          <p:nvPr/>
-        </p:nvSpPr>
-        <p:spPr>
-          <a:xfrm>
-            <a:off x="10028312" y="2002733"/>
-            <a:ext cx="1068780" cy="461665"/>
-          </a:xfrm>
-          <a:prstGeom prst="rect">
-            <a:avLst/>
-          </a:prstGeom>
-          <a:noFill/>
-        </p:spPr>
-        <p:txBody>
-          <a:bodyPr wrap="square" rtlCol="0">
-            <a:spAutoFit/>
-          </a:bodyPr>
-          <a:lstStyle/>
-          <a:p>
-            <a:pPr algn="ctr"/>
-            <a:r>
-              <a:rPr lang="en-US" sz="1200" dirty="0"/>
-              <a:t>observed value</a:t>
-            </a:r>
-          </a:p>
-        </p:txBody>
-      </p:sp>
-      <p:sp>
-        <p:nvSpPr>
-          <p:cNvPr id="9" name="TextBox 8">
-            <a:extLst>
-              <a:ext uri="{FF2B5EF4-FFF2-40B4-BE49-F238E27FC236}">
-                <a16:creationId xmlns:a16="http://schemas.microsoft.com/office/drawing/2014/main" id="{5BDCC29F-9F5C-1440-873D-5D8FB15EF8EF}"/>
-              </a:ext>
-            </a:extLst>
-          </p:cNvPr>
-          <p:cNvSpPr txBox="1"/>
-          <p:nvPr/>
-        </p:nvSpPr>
-        <p:spPr>
-          <a:xfrm>
-            <a:off x="7871569" y="822622"/>
-            <a:ext cx="1068780" cy="461665"/>
-          </a:xfrm>
-          <a:prstGeom prst="rect">
-            <a:avLst/>
-          </a:prstGeom>
-          <a:noFill/>
-        </p:spPr>
-        <p:txBody>
-          <a:bodyPr wrap="square" rtlCol="0">
-            <a:spAutoFit/>
-          </a:bodyPr>
-          <a:lstStyle/>
-          <a:p>
-            <a:pPr algn="ctr"/>
-            <a:r>
-              <a:rPr lang="en-US" sz="1200" dirty="0"/>
-              <a:t>reference distribution</a:t>
-            </a:r>
-          </a:p>
-        </p:txBody>
-      </p:sp>
-      <p:sp>
-        <p:nvSpPr>
-          <p:cNvPr id="10" name="TextBox 9">
-            <a:extLst>
-              <a:ext uri="{FF2B5EF4-FFF2-40B4-BE49-F238E27FC236}">
-                <a16:creationId xmlns:a16="http://schemas.microsoft.com/office/drawing/2014/main" id="{06E408CC-8C53-F245-90B4-0270DB483613}"/>
-              </a:ext>
-            </a:extLst>
-          </p:cNvPr>
-          <p:cNvSpPr txBox="1"/>
-          <p:nvPr/>
-        </p:nvSpPr>
-        <p:spPr>
-          <a:xfrm>
-            <a:off x="11028220" y="822622"/>
-            <a:ext cx="1068780" cy="461665"/>
-          </a:xfrm>
-          <a:prstGeom prst="rect">
-            <a:avLst/>
-          </a:prstGeom>
-          <a:noFill/>
-        </p:spPr>
-        <p:txBody>
-          <a:bodyPr wrap="square" rtlCol="0">
-            <a:spAutoFit/>
-          </a:bodyPr>
-          <a:lstStyle/>
-          <a:p>
-            <a:pPr algn="ctr"/>
-            <a:r>
-              <a:rPr lang="en-US" sz="1200" dirty="0"/>
-              <a:t>observed distribution</a:t>
-            </a:r>
-          </a:p>
-        </p:txBody>
-      </p:sp>
-      <p:sp>
-        <p:nvSpPr>
-          <p:cNvPr id="3" name="TextBox 2">
-            <a:extLst>
-              <a:ext uri="{FF2B5EF4-FFF2-40B4-BE49-F238E27FC236}">
-                <a16:creationId xmlns:a16="http://schemas.microsoft.com/office/drawing/2014/main" id="{54CC6AAC-BE48-F24F-B50C-6FBC87FD3E60}"/>
-              </a:ext>
-            </a:extLst>
-          </p:cNvPr>
-          <p:cNvSpPr txBox="1"/>
-          <p:nvPr/>
-        </p:nvSpPr>
-        <p:spPr>
-          <a:xfrm>
-            <a:off x="8027719" y="4999512"/>
-            <a:ext cx="4069281" cy="1600438"/>
-          </a:xfrm>
-          <a:prstGeom prst="rect">
-            <a:avLst/>
-          </a:prstGeom>
-          <a:noFill/>
-        </p:spPr>
-        <p:txBody>
-          <a:bodyPr wrap="square" rtlCol="0">
-            <a:spAutoFit/>
-          </a:bodyPr>
-          <a:lstStyle/>
-          <a:p>
-            <a:pPr lvl="0">
-              <a:buSzPts val="1100"/>
-            </a:pPr>
-            <a:r>
-              <a:rPr lang="en-US" b="1" dirty="0">
-                <a:solidFill>
-                  <a:srgbClr val="0070C0"/>
-                </a:solidFill>
-                <a:latin typeface="Calibri"/>
-                <a:ea typeface="Calibri"/>
-                <a:cs typeface="Calibri"/>
-                <a:sym typeface="Calibri"/>
-              </a:rPr>
-              <a:t>P-Value:</a:t>
-            </a:r>
-          </a:p>
-          <a:p>
-            <a:pPr lvl="0">
-              <a:buSzPts val="1100"/>
-            </a:pPr>
-            <a:r>
-              <a:rPr lang="en-US" dirty="0">
-                <a:solidFill>
-                  <a:schemeClr val="dk1"/>
-                </a:solidFill>
-                <a:latin typeface="Calibri"/>
-                <a:ea typeface="Calibri"/>
-                <a:cs typeface="Calibri"/>
-                <a:sym typeface="Calibri"/>
-              </a:rPr>
-              <a:t>Given</a:t>
-            </a:r>
-          </a:p>
-          <a:p>
-            <a:pPr marL="285750" lvl="0" indent="-285750">
-              <a:buSzPts val="1100"/>
-              <a:buFont typeface="Arial" panose="020B0604020202020204" pitchFamily="34" charset="0"/>
-              <a:buChar char="•"/>
-            </a:pPr>
-            <a:r>
-              <a:rPr lang="en-US" dirty="0">
-                <a:solidFill>
-                  <a:schemeClr val="dk1"/>
-                </a:solidFill>
-                <a:latin typeface="Calibri"/>
-                <a:ea typeface="Calibri"/>
-                <a:cs typeface="Calibri"/>
-                <a:sym typeface="Calibri"/>
-              </a:rPr>
-              <a:t>null-hypothesis (value) </a:t>
-            </a:r>
-          </a:p>
-          <a:p>
-            <a:pPr marL="285750" lvl="0" indent="-285750">
-              <a:buSzPts val="1100"/>
-              <a:buFont typeface="Arial" panose="020B0604020202020204" pitchFamily="34" charset="0"/>
-              <a:buChar char="•"/>
-            </a:pPr>
-            <a:r>
-              <a:rPr lang="en-US" dirty="0">
-                <a:solidFill>
-                  <a:schemeClr val="dk1"/>
-                </a:solidFill>
-                <a:latin typeface="Calibri"/>
-                <a:ea typeface="Calibri"/>
-                <a:cs typeface="Calibri"/>
-                <a:sym typeface="Calibri"/>
-              </a:rPr>
-              <a:t>distribution</a:t>
-            </a:r>
-          </a:p>
-          <a:p>
-            <a:pPr marL="285750" lvl="0" indent="-285750">
-              <a:buSzPts val="1100"/>
-              <a:buFont typeface="Arial" panose="020B0604020202020204" pitchFamily="34" charset="0"/>
-              <a:buChar char="•"/>
-            </a:pPr>
-            <a:r>
-              <a:rPr lang="en-US" dirty="0">
-                <a:solidFill>
-                  <a:schemeClr val="dk1"/>
-                </a:solidFill>
-                <a:latin typeface="Calibri"/>
-                <a:ea typeface="Calibri"/>
-                <a:cs typeface="Calibri"/>
-                <a:sym typeface="Calibri"/>
-              </a:rPr>
-              <a:t>observed value</a:t>
-            </a:r>
-          </a:p>
-          <a:p>
-            <a:pPr lvl="0">
-              <a:buSzPts val="1100"/>
-            </a:pPr>
-            <a:r>
-              <a:rPr lang="en-US" dirty="0">
-                <a:solidFill>
-                  <a:schemeClr val="dk1"/>
-                </a:solidFill>
-                <a:latin typeface="Calibri"/>
-                <a:ea typeface="Calibri"/>
-                <a:cs typeface="Calibri"/>
-                <a:sym typeface="Calibri"/>
-              </a:rPr>
-              <a:t>Calculate the probability of getting the result "at least as extreme as observed". </a:t>
-            </a:r>
-            <a:endParaRPr lang="en-US" dirty="0"/>
-          </a:p>
-        </p:txBody>
-      </p:sp>
-      <p:sp>
-        <p:nvSpPr>
-          <p:cNvPr id="12" name="Google Shape;106;p15">
-            <a:extLst>
-              <a:ext uri="{FF2B5EF4-FFF2-40B4-BE49-F238E27FC236}">
-                <a16:creationId xmlns:a16="http://schemas.microsoft.com/office/drawing/2014/main" id="{2CE1448C-D3B8-B642-A081-FF386148205D}"/>
-              </a:ext>
-            </a:extLst>
-          </p:cNvPr>
-          <p:cNvSpPr txBox="1"/>
-          <p:nvPr/>
-        </p:nvSpPr>
-        <p:spPr>
-          <a:xfrm>
-            <a:off x="275109" y="754595"/>
-            <a:ext cx="6964298" cy="5845355"/>
-          </a:xfrm>
-          <a:prstGeom prst="rect">
-            <a:avLst/>
-          </a:prstGeom>
-          <a:noFill/>
-          <a:ln>
-            <a:noFill/>
-          </a:ln>
-        </p:spPr>
-        <p:txBody>
-          <a:bodyPr spcFirstLastPara="1" wrap="square" lIns="91425" tIns="45700" rIns="91425" bIns="45700" anchor="t" anchorCtr="0">
-            <a:noAutofit/>
-          </a:bodyPr>
-          <a:lstStyle/>
-          <a:p>
-            <a:pPr marL="0" marR="0" lvl="0" indent="0" algn="l" rtl="0">
-              <a:spcBef>
-                <a:spcPts val="0"/>
-              </a:spcBef>
-              <a:spcAft>
-                <a:spcPts val="0"/>
-              </a:spcAft>
-              <a:buSzPts val="1100"/>
-              <a:buNone/>
-            </a:pPr>
-            <a:r>
-              <a:rPr lang="en-US" dirty="0">
-                <a:solidFill>
-                  <a:schemeClr val="dk1"/>
-                </a:solidFill>
-                <a:latin typeface="Calibri"/>
-                <a:ea typeface="Calibri"/>
-                <a:cs typeface="Calibri"/>
-                <a:sym typeface="Calibri"/>
-              </a:rPr>
-              <a:t>A </a:t>
-            </a:r>
-            <a:r>
-              <a:rPr lang="en-US" b="1" dirty="0">
-                <a:solidFill>
-                  <a:srgbClr val="0000FF"/>
-                </a:solidFill>
-                <a:latin typeface="Calibri"/>
-                <a:ea typeface="Calibri"/>
-                <a:cs typeface="Calibri"/>
-                <a:sym typeface="Calibri"/>
-              </a:rPr>
-              <a:t>p-value</a:t>
-            </a:r>
-            <a:r>
-              <a:rPr lang="en-US" dirty="0">
-                <a:solidFill>
-                  <a:schemeClr val="dk1"/>
-                </a:solidFill>
-                <a:latin typeface="Calibri"/>
-                <a:ea typeface="Calibri"/>
-                <a:cs typeface="Calibri"/>
-                <a:sym typeface="Calibri"/>
-              </a:rPr>
-              <a:t> (probability value) is a probability </a:t>
-            </a:r>
-          </a:p>
-          <a:p>
-            <a:pPr marL="0" marR="0" lvl="0" indent="0" algn="l" rtl="0">
-              <a:spcBef>
-                <a:spcPts val="0"/>
-              </a:spcBef>
-              <a:spcAft>
-                <a:spcPts val="0"/>
-              </a:spcAft>
-              <a:buSzPts val="1100"/>
-              <a:buNone/>
-            </a:pPr>
-            <a:r>
-              <a:rPr lang="en-US" dirty="0">
-                <a:solidFill>
-                  <a:schemeClr val="dk1"/>
-                </a:solidFill>
-                <a:latin typeface="Calibri"/>
-                <a:ea typeface="Calibri"/>
-                <a:cs typeface="Calibri"/>
-                <a:sym typeface="Calibri"/>
-              </a:rPr>
-              <a:t>of getting results at least as extreme as observed. </a:t>
-            </a:r>
-          </a:p>
-          <a:p>
-            <a:pPr marL="0" marR="0" lvl="0" indent="0" algn="l" rtl="0">
-              <a:spcBef>
-                <a:spcPts val="0"/>
-              </a:spcBef>
-              <a:spcAft>
-                <a:spcPts val="0"/>
-              </a:spcAft>
-              <a:buSzPts val="1100"/>
-              <a:buNone/>
-            </a:pPr>
-            <a:br>
-              <a:rPr lang="en-US" dirty="0">
-                <a:solidFill>
-                  <a:schemeClr val="dk1"/>
-                </a:solidFill>
-                <a:latin typeface="Calibri"/>
-                <a:ea typeface="Calibri"/>
-                <a:cs typeface="Calibri"/>
-                <a:sym typeface="Calibri"/>
-              </a:rPr>
-            </a:br>
-            <a:r>
-              <a:rPr lang="en-US" dirty="0">
-                <a:solidFill>
-                  <a:srgbClr val="00B050"/>
-                </a:solidFill>
-                <a:latin typeface="Calibri"/>
-                <a:ea typeface="Calibri"/>
-                <a:cs typeface="Calibri"/>
-                <a:sym typeface="Calibri"/>
-              </a:rPr>
-              <a:t>We are given:</a:t>
-            </a:r>
-          </a:p>
-          <a:p>
-            <a:pPr marL="0" marR="0" lvl="0" indent="0" algn="l" rtl="0">
-              <a:spcBef>
-                <a:spcPts val="0"/>
-              </a:spcBef>
-              <a:spcAft>
-                <a:spcPts val="0"/>
-              </a:spcAft>
-              <a:buSzPts val="1100"/>
-              <a:buNone/>
-            </a:pPr>
-            <a:r>
-              <a:rPr lang="en-US" dirty="0">
-                <a:solidFill>
-                  <a:srgbClr val="00B050"/>
-                </a:solidFill>
-                <a:latin typeface="Calibri"/>
-                <a:ea typeface="Calibri"/>
-                <a:cs typeface="Calibri"/>
-                <a:sym typeface="Calibri"/>
-              </a:rPr>
-              <a:t>        1. A null-hypothesis (</a:t>
-            </a:r>
-            <a:r>
-              <a:rPr lang="en-US" b="1" dirty="0">
-                <a:solidFill>
-                  <a:srgbClr val="00B050"/>
-                </a:solidFill>
-                <a:latin typeface="Calibri"/>
-                <a:ea typeface="Calibri"/>
-                <a:cs typeface="Calibri"/>
-                <a:sym typeface="Calibri"/>
-              </a:rPr>
-              <a:t>value</a:t>
-            </a:r>
-            <a:r>
-              <a:rPr lang="en-US" dirty="0">
-                <a:solidFill>
-                  <a:srgbClr val="00B050"/>
-                </a:solidFill>
-                <a:latin typeface="Calibri"/>
-                <a:ea typeface="Calibri"/>
-                <a:cs typeface="Calibri"/>
-                <a:sym typeface="Calibri"/>
-              </a:rPr>
-              <a:t>)</a:t>
-            </a:r>
-          </a:p>
-          <a:p>
-            <a:pPr lvl="0">
-              <a:buSzPts val="1100"/>
-            </a:pPr>
-            <a:r>
-              <a:rPr lang="en-US" dirty="0">
-                <a:solidFill>
-                  <a:srgbClr val="00B050"/>
-                </a:solidFill>
-                <a:latin typeface="Calibri"/>
-                <a:ea typeface="Calibri"/>
-                <a:cs typeface="Calibri"/>
-                <a:sym typeface="Calibri"/>
-              </a:rPr>
-              <a:t>        2. A distribution: explicit or theoretical (</a:t>
-            </a:r>
-            <a:r>
-              <a:rPr lang="en-US" b="1" u="sng" dirty="0">
-                <a:solidFill>
-                  <a:srgbClr val="00B050"/>
-                </a:solidFill>
-                <a:latin typeface="Calibri"/>
-                <a:ea typeface="Calibri"/>
-                <a:cs typeface="Calibri"/>
-                <a:sym typeface="Calibri"/>
-              </a:rPr>
-              <a:t>reference</a:t>
-            </a:r>
-            <a:r>
-              <a:rPr lang="en-US" dirty="0">
-                <a:solidFill>
-                  <a:srgbClr val="00B050"/>
-                </a:solidFill>
-                <a:latin typeface="Calibri"/>
-                <a:ea typeface="Calibri"/>
-                <a:cs typeface="Calibri"/>
-                <a:sym typeface="Calibri"/>
-              </a:rPr>
-              <a:t>), or sample distribution (</a:t>
-            </a:r>
-            <a:r>
-              <a:rPr lang="en-US" b="1" u="sng" dirty="0">
-                <a:solidFill>
-                  <a:srgbClr val="00B050"/>
-                </a:solidFill>
-                <a:latin typeface="Calibri"/>
-                <a:ea typeface="Calibri"/>
-                <a:cs typeface="Calibri"/>
-                <a:sym typeface="Calibri"/>
-              </a:rPr>
-              <a:t>observed</a:t>
-            </a:r>
-            <a:r>
-              <a:rPr lang="en-US" dirty="0">
-                <a:solidFill>
-                  <a:srgbClr val="00B050"/>
-                </a:solidFill>
-                <a:latin typeface="Calibri"/>
-                <a:ea typeface="Calibri"/>
-                <a:cs typeface="Calibri"/>
-                <a:sym typeface="Calibri"/>
-              </a:rPr>
-              <a:t>).</a:t>
-            </a:r>
-            <a:br>
-              <a:rPr lang="en-US" dirty="0">
-                <a:solidFill>
-                  <a:srgbClr val="00B050"/>
-                </a:solidFill>
-                <a:latin typeface="Calibri"/>
-                <a:ea typeface="Calibri"/>
-                <a:cs typeface="Calibri"/>
-                <a:sym typeface="Calibri"/>
-              </a:rPr>
-            </a:br>
-            <a:r>
-              <a:rPr lang="en-US" dirty="0">
-                <a:solidFill>
-                  <a:srgbClr val="00B050"/>
-                </a:solidFill>
-                <a:latin typeface="Calibri"/>
-                <a:ea typeface="Calibri"/>
-                <a:cs typeface="Calibri"/>
-                <a:sym typeface="Calibri"/>
-              </a:rPr>
-              <a:t>             Most common distributions - Gaussian, t-Student, Chi-squared, F-, etc.</a:t>
-            </a:r>
-          </a:p>
-          <a:p>
-            <a:pPr lvl="0">
-              <a:buSzPts val="1100"/>
-            </a:pPr>
-            <a:r>
-              <a:rPr lang="en-US" dirty="0">
-                <a:solidFill>
-                  <a:srgbClr val="00B050"/>
-                </a:solidFill>
-                <a:latin typeface="Calibri"/>
-                <a:ea typeface="Calibri"/>
-                <a:cs typeface="Calibri"/>
-                <a:sym typeface="Calibri"/>
-              </a:rPr>
-              <a:t>        3. Observed </a:t>
-            </a:r>
-            <a:r>
-              <a:rPr lang="en-US" b="1" dirty="0">
-                <a:solidFill>
-                  <a:srgbClr val="00B050"/>
-                </a:solidFill>
-                <a:latin typeface="Calibri"/>
-                <a:ea typeface="Calibri"/>
-                <a:cs typeface="Calibri"/>
-                <a:sym typeface="Calibri"/>
-              </a:rPr>
-              <a:t>value</a:t>
-            </a:r>
-          </a:p>
-          <a:p>
-            <a:pPr lvl="0">
-              <a:buSzPts val="1100"/>
-            </a:pPr>
-            <a:endParaRPr lang="en-US" dirty="0">
-              <a:solidFill>
-                <a:srgbClr val="00B050"/>
-              </a:solidFill>
-              <a:latin typeface="Calibri"/>
-              <a:ea typeface="Calibri"/>
-              <a:cs typeface="Calibri"/>
-              <a:sym typeface="Calibri"/>
-            </a:endParaRPr>
-          </a:p>
-          <a:p>
-            <a:pPr lvl="0">
-              <a:buSzPts val="1100"/>
-            </a:pPr>
-            <a:r>
-              <a:rPr lang="en-US" dirty="0">
-                <a:solidFill>
-                  <a:srgbClr val="00B050"/>
-                </a:solidFill>
-                <a:latin typeface="Calibri"/>
-                <a:ea typeface="Calibri"/>
-                <a:cs typeface="Calibri"/>
-                <a:sym typeface="Calibri"/>
-              </a:rPr>
-              <a:t>From that we calculate the probability of getting a result "at least as extreme as observed" ?</a:t>
-            </a:r>
-          </a:p>
-          <a:p>
-            <a:pPr marL="0" marR="0" lvl="0" indent="0" algn="l" rtl="0">
-              <a:spcBef>
-                <a:spcPts val="0"/>
-              </a:spcBef>
-              <a:spcAft>
-                <a:spcPts val="0"/>
-              </a:spcAft>
-              <a:buSzPts val="1100"/>
-              <a:buNone/>
-            </a:pPr>
-            <a:endParaRPr lang="en-US" sz="800" dirty="0">
-              <a:solidFill>
-                <a:schemeClr val="dk1"/>
-              </a:solidFill>
-              <a:latin typeface="Calibri"/>
-              <a:ea typeface="Calibri"/>
-              <a:cs typeface="Calibri"/>
-              <a:sym typeface="Calibri"/>
-            </a:endParaRPr>
-          </a:p>
-          <a:p>
-            <a:pPr marL="0" marR="0" lvl="0" indent="0" algn="l" rtl="0">
-              <a:spcBef>
-                <a:spcPts val="0"/>
-              </a:spcBef>
-              <a:spcAft>
-                <a:spcPts val="0"/>
-              </a:spcAft>
-              <a:buSzPts val="1100"/>
-              <a:buNone/>
-            </a:pPr>
-            <a:endParaRPr lang="en-US" dirty="0">
-              <a:solidFill>
-                <a:schemeClr val="dk1"/>
-              </a:solidFill>
-              <a:latin typeface="Calibri"/>
-              <a:ea typeface="Calibri"/>
-              <a:cs typeface="Calibri"/>
-              <a:sym typeface="Calibri"/>
-            </a:endParaRPr>
-          </a:p>
-          <a:p>
-            <a:pPr marL="0" marR="0" lvl="0" indent="0" algn="l" rtl="0">
-              <a:spcBef>
-                <a:spcPts val="0"/>
-              </a:spcBef>
-              <a:spcAft>
-                <a:spcPts val="0"/>
-              </a:spcAft>
-              <a:buSzPts val="1100"/>
-              <a:buNone/>
-            </a:pPr>
-            <a:r>
-              <a:rPr lang="en-US" dirty="0">
-                <a:solidFill>
-                  <a:schemeClr val="dk1"/>
-                </a:solidFill>
-                <a:latin typeface="Calibri"/>
-                <a:ea typeface="Calibri"/>
-                <a:cs typeface="Calibri"/>
-                <a:sym typeface="Calibri"/>
-              </a:rPr>
-              <a:t>If this probability is very small, this means </a:t>
-            </a:r>
-          </a:p>
-          <a:p>
-            <a:pPr marL="0" marR="0" lvl="0" indent="0" algn="l" rtl="0">
-              <a:spcBef>
-                <a:spcPts val="0"/>
-              </a:spcBef>
-              <a:spcAft>
-                <a:spcPts val="0"/>
-              </a:spcAft>
-              <a:buSzPts val="1100"/>
-              <a:buNone/>
-            </a:pPr>
-            <a:r>
-              <a:rPr lang="en-US" dirty="0">
-                <a:solidFill>
-                  <a:schemeClr val="dk1"/>
-                </a:solidFill>
-                <a:latin typeface="Calibri"/>
-                <a:ea typeface="Calibri"/>
-                <a:cs typeface="Calibri"/>
-                <a:sym typeface="Calibri"/>
-              </a:rPr>
-              <a:t>that the result is unlikely to be explained by the null hypothesis.</a:t>
-            </a:r>
-          </a:p>
-          <a:p>
-            <a:pPr marL="0" marR="0" lvl="0" indent="0" algn="l" rtl="0">
-              <a:spcBef>
-                <a:spcPts val="0"/>
-              </a:spcBef>
-              <a:spcAft>
-                <a:spcPts val="0"/>
-              </a:spcAft>
-              <a:buSzPts val="1100"/>
-              <a:buNone/>
-            </a:pPr>
-            <a:r>
-              <a:rPr lang="en-US" dirty="0">
-                <a:solidFill>
-                  <a:schemeClr val="dk1"/>
-                </a:solidFill>
-                <a:latin typeface="Calibri"/>
-                <a:ea typeface="Calibri"/>
-                <a:cs typeface="Calibri"/>
-                <a:sym typeface="Calibri"/>
-              </a:rPr>
-              <a:t>So we reject the null hypothesis.</a:t>
-            </a:r>
-          </a:p>
-          <a:p>
-            <a:pPr marL="0" marR="0" lvl="0" indent="0" algn="l" rtl="0">
-              <a:spcBef>
-                <a:spcPts val="0"/>
-              </a:spcBef>
-              <a:spcAft>
-                <a:spcPts val="0"/>
-              </a:spcAft>
-              <a:buSzPts val="1100"/>
-              <a:buNone/>
-            </a:pPr>
-            <a:endParaRPr dirty="0">
-              <a:solidFill>
-                <a:schemeClr val="dk1"/>
-              </a:solidFill>
-              <a:latin typeface="Calibri"/>
-              <a:ea typeface="Calibri"/>
-              <a:cs typeface="Calibri"/>
-              <a:sym typeface="Calibri"/>
-            </a:endParaRPr>
-          </a:p>
-          <a:p>
-            <a:pPr marL="0" marR="0" lvl="0" indent="0" algn="l" rtl="0">
-              <a:spcBef>
-                <a:spcPts val="0"/>
-              </a:spcBef>
-              <a:spcAft>
-                <a:spcPts val="0"/>
-              </a:spcAft>
-              <a:buSzPts val="1100"/>
-              <a:buNone/>
-            </a:pPr>
-            <a:endParaRPr sz="800" dirty="0">
-              <a:solidFill>
-                <a:schemeClr val="dk1"/>
-              </a:solidFill>
-              <a:latin typeface="Calibri"/>
-              <a:ea typeface="Calibri"/>
-              <a:cs typeface="Calibri"/>
-              <a:sym typeface="Calibri"/>
-            </a:endParaRPr>
-          </a:p>
-          <a:p>
-            <a:pPr lvl="0">
-              <a:buSzPts val="1100"/>
-            </a:pPr>
-            <a:r>
-              <a:rPr lang="en-US" sz="1200" b="1" dirty="0">
-                <a:solidFill>
-                  <a:srgbClr val="0070C0"/>
-                </a:solidFill>
-                <a:latin typeface="Courier New"/>
-                <a:ea typeface="Courier New"/>
-                <a:cs typeface="Courier New"/>
-                <a:sym typeface="Courier New"/>
-              </a:rPr>
-              <a:t>            P-value    probability of observed</a:t>
-            </a:r>
-            <a:endParaRPr sz="1200" b="1" dirty="0">
-              <a:solidFill>
-                <a:srgbClr val="0070C0"/>
-              </a:solidFill>
-              <a:latin typeface="Courier New"/>
-              <a:ea typeface="Courier New"/>
-              <a:cs typeface="Courier New"/>
-              <a:sym typeface="Courier New"/>
-            </a:endParaRPr>
-          </a:p>
-          <a:p>
-            <a:pPr lvl="0">
-              <a:buSzPts val="1100"/>
-            </a:pPr>
-            <a:r>
-              <a:rPr lang="en-US" sz="1200" b="1" dirty="0">
-                <a:solidFill>
-                  <a:srgbClr val="0070C0"/>
-                </a:solidFill>
-                <a:latin typeface="Courier New"/>
-                <a:ea typeface="Courier New"/>
-                <a:cs typeface="Courier New"/>
-                <a:sym typeface="Courier New"/>
-              </a:rPr>
-              <a:t>            -------------------------------</a:t>
-            </a:r>
-            <a:endParaRPr sz="1200" b="1" dirty="0">
-              <a:solidFill>
-                <a:srgbClr val="0070C0"/>
-              </a:solidFill>
-              <a:latin typeface="Courier New"/>
-              <a:ea typeface="Courier New"/>
-              <a:cs typeface="Courier New"/>
-              <a:sym typeface="Courier New"/>
-            </a:endParaRPr>
-          </a:p>
-          <a:p>
-            <a:pPr lvl="0">
-              <a:buSzPts val="1100"/>
-            </a:pPr>
-            <a:r>
-              <a:rPr lang="en-US" sz="1200" b="1" dirty="0">
-                <a:solidFill>
-                  <a:srgbClr val="0070C0"/>
-                </a:solidFill>
-                <a:latin typeface="Courier New"/>
-                <a:ea typeface="Courier New"/>
-                <a:cs typeface="Courier New"/>
-                <a:sym typeface="Courier New"/>
-              </a:rPr>
-              <a:t>            P &lt; 0.05         5%</a:t>
-            </a:r>
-            <a:endParaRPr sz="1200" b="1" dirty="0">
-              <a:solidFill>
-                <a:srgbClr val="0070C0"/>
-              </a:solidFill>
-              <a:latin typeface="Courier New"/>
-              <a:ea typeface="Courier New"/>
-              <a:cs typeface="Courier New"/>
-              <a:sym typeface="Courier New"/>
-            </a:endParaRPr>
-          </a:p>
-          <a:p>
-            <a:pPr lvl="0">
-              <a:buSzPts val="1100"/>
-            </a:pPr>
-            <a:r>
-              <a:rPr lang="en-US" sz="1200" b="1" dirty="0">
-                <a:solidFill>
-                  <a:srgbClr val="0070C0"/>
-                </a:solidFill>
-                <a:latin typeface="Courier New"/>
-                <a:ea typeface="Courier New"/>
-                <a:cs typeface="Courier New"/>
-                <a:sym typeface="Courier New"/>
-              </a:rPr>
-              <a:t>            P &lt; 0.01         1%</a:t>
-            </a:r>
-            <a:endParaRPr sz="1200" b="1" dirty="0">
-              <a:solidFill>
-                <a:srgbClr val="0070C0"/>
-              </a:solidFill>
-              <a:latin typeface="Courier New"/>
-              <a:ea typeface="Courier New"/>
-              <a:cs typeface="Courier New"/>
-              <a:sym typeface="Courier New"/>
-            </a:endParaRPr>
-          </a:p>
-          <a:p>
-            <a:pPr lvl="0">
-              <a:buSzPts val="1100"/>
-            </a:pPr>
-            <a:r>
-              <a:rPr lang="en-US" sz="1200" b="1" dirty="0">
-                <a:solidFill>
-                  <a:srgbClr val="0070C0"/>
-                </a:solidFill>
-                <a:latin typeface="Courier New"/>
-                <a:ea typeface="Courier New"/>
-                <a:cs typeface="Courier New"/>
-                <a:sym typeface="Courier New"/>
-              </a:rPr>
-              <a:t>            p &lt; 0.001        0.1%</a:t>
-            </a:r>
-            <a:endParaRPr sz="1200" b="1" dirty="0">
-              <a:solidFill>
-                <a:srgbClr val="0070C0"/>
-              </a:solidFill>
-              <a:latin typeface="Courier New"/>
-              <a:ea typeface="Courier New"/>
-              <a:cs typeface="Courier New"/>
-              <a:sym typeface="Courier New"/>
-            </a:endParaRPr>
-          </a:p>
-          <a:p>
-            <a:pPr lvl="0">
-              <a:buSzPts val="1100"/>
-            </a:pPr>
-            <a:r>
-              <a:rPr lang="en-US" sz="1200" b="1" dirty="0">
-                <a:solidFill>
-                  <a:srgbClr val="0070C0"/>
-                </a:solidFill>
-                <a:latin typeface="Courier New"/>
-                <a:ea typeface="Courier New"/>
-                <a:cs typeface="Courier New"/>
-                <a:sym typeface="Courier New"/>
-              </a:rPr>
-              <a:t>            -------------------------------</a:t>
-            </a:r>
-            <a:endParaRPr sz="1200" dirty="0">
-              <a:solidFill>
-                <a:schemeClr val="dk1"/>
-              </a:solidFill>
-              <a:latin typeface="Calibri"/>
-              <a:ea typeface="Calibri"/>
-              <a:cs typeface="Calibri"/>
-              <a:sym typeface="Calibri"/>
-            </a:endParaRPr>
-          </a:p>
-          <a:p>
-            <a:pPr lvl="0">
-              <a:buSzPts val="1100"/>
-            </a:pPr>
-            <a:endParaRPr lang="en-US" dirty="0">
-              <a:solidFill>
-                <a:schemeClr val="dk1"/>
-              </a:solidFill>
-              <a:latin typeface="Calibri"/>
-              <a:ea typeface="Calibri"/>
-              <a:cs typeface="Calibri"/>
-              <a:sym typeface="Calibri"/>
-            </a:endParaRPr>
-          </a:p>
-          <a:p>
-            <a:pPr lvl="0">
-              <a:buSzPts val="1100"/>
-            </a:pPr>
-            <a:r>
-              <a:rPr lang="en-US" dirty="0">
-                <a:solidFill>
-                  <a:schemeClr val="dk1"/>
-                </a:solidFill>
-                <a:latin typeface="Calibri"/>
-                <a:ea typeface="Calibri"/>
-                <a:cs typeface="Calibri"/>
-                <a:sym typeface="Calibri"/>
-              </a:rPr>
-              <a:t>A small p-value (typically ≤ 0.05) indicates strong </a:t>
-            </a:r>
-          </a:p>
-          <a:p>
-            <a:pPr lvl="0">
-              <a:buSzPts val="1100"/>
-            </a:pPr>
-            <a:r>
-              <a:rPr lang="en-US" dirty="0">
-                <a:solidFill>
-                  <a:schemeClr val="dk1"/>
-                </a:solidFill>
-                <a:latin typeface="Calibri"/>
-                <a:ea typeface="Calibri"/>
-                <a:cs typeface="Calibri"/>
-                <a:sym typeface="Calibri"/>
-              </a:rPr>
-              <a:t>evidence </a:t>
-            </a:r>
-            <a:r>
-              <a:rPr lang="en-US" b="1" dirty="0">
-                <a:solidFill>
-                  <a:srgbClr val="FF0000"/>
-                </a:solidFill>
-                <a:latin typeface="Calibri"/>
-                <a:ea typeface="Calibri"/>
-                <a:cs typeface="Calibri"/>
-                <a:sym typeface="Calibri"/>
-              </a:rPr>
-              <a:t>against</a:t>
-            </a:r>
-            <a:r>
-              <a:rPr lang="en-US" dirty="0">
-                <a:solidFill>
-                  <a:schemeClr val="dk1"/>
-                </a:solidFill>
-                <a:latin typeface="Calibri"/>
-                <a:ea typeface="Calibri"/>
-                <a:cs typeface="Calibri"/>
-                <a:sym typeface="Calibri"/>
-              </a:rPr>
-              <a:t> the null hypothesis, </a:t>
-            </a:r>
-          </a:p>
-          <a:p>
-            <a:pPr lvl="0">
-              <a:buSzPts val="1100"/>
-            </a:pPr>
-            <a:r>
-              <a:rPr lang="en-US" dirty="0">
-                <a:solidFill>
-                  <a:schemeClr val="dk1"/>
-                </a:solidFill>
-                <a:latin typeface="Calibri"/>
-                <a:ea typeface="Calibri"/>
-                <a:cs typeface="Calibri"/>
-                <a:sym typeface="Calibri"/>
-              </a:rPr>
-              <a:t>so you reject the null hypothesis. </a:t>
-            </a:r>
-          </a:p>
-          <a:p>
-            <a:pPr lvl="0">
-              <a:buSzPts val="1100"/>
-            </a:pPr>
-            <a:r>
-              <a:rPr lang="en-US" dirty="0">
-                <a:solidFill>
-                  <a:schemeClr val="dk1"/>
-                </a:solidFill>
-                <a:latin typeface="Calibri"/>
-                <a:ea typeface="Calibri"/>
-                <a:cs typeface="Calibri"/>
-                <a:sym typeface="Calibri"/>
-              </a:rPr>
-              <a:t>People say that this evidence is "</a:t>
-            </a:r>
-            <a:r>
-              <a:rPr lang="en-US" b="1" dirty="0">
-                <a:solidFill>
-                  <a:srgbClr val="FF0000"/>
-                </a:solidFill>
-                <a:latin typeface="Calibri"/>
-                <a:ea typeface="Calibri"/>
-                <a:cs typeface="Calibri"/>
-                <a:sym typeface="Calibri"/>
-              </a:rPr>
-              <a:t>statistically significant</a:t>
-            </a:r>
-            <a:r>
-              <a:rPr lang="en-US" dirty="0">
-                <a:solidFill>
-                  <a:schemeClr val="dk1"/>
-                </a:solidFill>
-                <a:latin typeface="Calibri"/>
-                <a:ea typeface="Calibri"/>
-                <a:cs typeface="Calibri"/>
-                <a:sym typeface="Calibri"/>
-              </a:rPr>
-              <a:t>".</a:t>
-            </a:r>
-          </a:p>
-          <a:p>
-            <a:pPr marL="0" marR="0" lvl="0" indent="0" algn="l" rtl="0">
-              <a:spcBef>
-                <a:spcPts val="0"/>
-              </a:spcBef>
-              <a:spcAft>
-                <a:spcPts val="0"/>
-              </a:spcAft>
-              <a:buSzPts val="1100"/>
-              <a:buNone/>
-            </a:pPr>
-            <a:endParaRPr sz="800" dirty="0">
-              <a:solidFill>
-                <a:schemeClr val="dk1"/>
-              </a:solidFill>
-              <a:latin typeface="Calibri"/>
-              <a:ea typeface="Calibri"/>
-              <a:cs typeface="Calibri"/>
-              <a:sym typeface="Calibri"/>
-            </a:endParaRPr>
-          </a:p>
-          <a:p>
-            <a:pPr lvl="0">
-              <a:buSzPts val="1100"/>
-            </a:pPr>
-            <a:endParaRPr dirty="0">
-              <a:solidFill>
-                <a:schemeClr val="dk1"/>
-              </a:solidFill>
-              <a:latin typeface="Calibri"/>
-              <a:ea typeface="Calibri"/>
-              <a:cs typeface="Calibri"/>
-              <a:sym typeface="Calibri"/>
-            </a:endParaRPr>
-          </a:p>
-        </p:txBody>
-      </p:sp>
-    </p:spTree>
-  </p:cSld>
-  <p:clrMapOvr>
-    <a:masterClrMapping/>
-  </p:clrMapOvr>
-</p:sld>
-</file>
-
-<file path=ppt/slides/slide6.xml><?xml version="1.0" encoding="utf-8"?>
-<p:sld xmlns:a="http://schemas.openxmlformats.org/drawingml/2006/main" xmlns:r="http://schemas.openxmlformats.org/officeDocument/2006/relationships" xmlns:p="http://schemas.openxmlformats.org/presentationml/2006/main">
-  <p:cSld>
-    <p:spTree>
-      <p:nvGrpSpPr>
-        <p:cNvPr id="1" name="Shape 105"/>
-        <p:cNvGrpSpPr/>
-        <p:nvPr/>
-      </p:nvGrpSpPr>
-      <p:grpSpPr>
-        <a:xfrm>
-          <a:off x="0" y="0"/>
-          <a:ext cx="0" cy="0"/>
-          <a:chOff x="0" y="0"/>
-          <a:chExt cx="0" cy="0"/>
-        </a:xfrm>
-      </p:grpSpPr>
-      <p:sp>
-        <p:nvSpPr>
-          <p:cNvPr id="106" name="Google Shape;106;p15"/>
-          <p:cNvSpPr txBox="1"/>
-          <p:nvPr/>
-        </p:nvSpPr>
-        <p:spPr>
-          <a:xfrm>
-            <a:off x="202957" y="1394749"/>
-            <a:ext cx="6934114" cy="4068501"/>
-          </a:xfrm>
-          <a:prstGeom prst="rect">
-            <a:avLst/>
-          </a:prstGeom>
-          <a:noFill/>
-          <a:ln>
-            <a:noFill/>
-          </a:ln>
-        </p:spPr>
-        <p:txBody>
-          <a:bodyPr spcFirstLastPara="1" wrap="square" lIns="91425" tIns="45700" rIns="91425" bIns="45700" anchor="t" anchorCtr="0">
-            <a:noAutofit/>
-          </a:bodyPr>
-          <a:lstStyle/>
-          <a:p>
-            <a:pPr lvl="0">
-              <a:buSzPts val="1100"/>
-            </a:pPr>
-            <a:r>
-              <a:rPr lang="en-US" b="1" dirty="0">
-                <a:solidFill>
-                  <a:srgbClr val="0000FF"/>
-                </a:solidFill>
-                <a:latin typeface="Calibri"/>
-                <a:cs typeface="Calibri"/>
-              </a:rPr>
-              <a:t>Level of significance</a:t>
-            </a:r>
-            <a:r>
-              <a:rPr lang="en-US" dirty="0">
-                <a:solidFill>
-                  <a:schemeClr val="tx1"/>
-                </a:solidFill>
-                <a:latin typeface="Calibri"/>
-                <a:cs typeface="Calibri"/>
-              </a:rPr>
-              <a:t> (</a:t>
-            </a:r>
-            <a:r>
-              <a:rPr lang="en-US" b="1" dirty="0">
-                <a:solidFill>
-                  <a:srgbClr val="FF0000"/>
-                </a:solidFill>
-                <a:latin typeface="Calibri"/>
-                <a:cs typeface="Calibri"/>
-              </a:rPr>
-              <a:t>alpha</a:t>
-            </a:r>
-            <a:r>
-              <a:rPr lang="en-US" dirty="0">
-                <a:solidFill>
-                  <a:schemeClr val="tx1"/>
-                </a:solidFill>
-                <a:latin typeface="Calibri"/>
-                <a:cs typeface="Calibri"/>
-              </a:rPr>
-              <a:t> or </a:t>
-            </a:r>
-            <a:r>
-              <a:rPr lang="el-GR" b="1" dirty="0">
-                <a:solidFill>
-                  <a:srgbClr val="FF0000"/>
-                </a:solidFill>
-                <a:latin typeface="Calibri"/>
-                <a:cs typeface="Calibri"/>
-              </a:rPr>
-              <a:t>α</a:t>
-            </a:r>
-            <a:r>
-              <a:rPr lang="en-US" dirty="0">
-                <a:solidFill>
-                  <a:schemeClr val="tx1"/>
-                </a:solidFill>
-                <a:latin typeface="Calibri"/>
-                <a:cs typeface="Calibri"/>
-              </a:rPr>
-              <a:t>, typically 0.05) – </a:t>
-            </a:r>
-          </a:p>
-          <a:p>
-            <a:pPr lvl="0">
-              <a:buSzPts val="1100"/>
-            </a:pPr>
-            <a:r>
-              <a:rPr lang="en-US" dirty="0">
-                <a:solidFill>
-                  <a:schemeClr val="tx1"/>
-                </a:solidFill>
-                <a:latin typeface="Calibri"/>
-                <a:cs typeface="Calibri"/>
-              </a:rPr>
-              <a:t>probability that the event could have occurred by chance. </a:t>
-            </a:r>
-          </a:p>
-          <a:p>
-            <a:pPr lvl="0">
-              <a:buSzPts val="1100"/>
-            </a:pPr>
-            <a:endParaRPr dirty="0">
-              <a:solidFill>
-                <a:schemeClr val="dk1"/>
-              </a:solidFill>
-              <a:latin typeface="Calibri"/>
-              <a:ea typeface="Calibri"/>
-              <a:cs typeface="Calibri"/>
-              <a:sym typeface="Calibri"/>
-            </a:endParaRPr>
-          </a:p>
-          <a:p>
-            <a:pPr marL="0" marR="0" lvl="0" indent="0" algn="l" rtl="0">
-              <a:spcBef>
-                <a:spcPts val="0"/>
-              </a:spcBef>
-              <a:spcAft>
-                <a:spcPts val="0"/>
-              </a:spcAft>
-              <a:buSzPts val="1100"/>
-              <a:buNone/>
-            </a:pPr>
-            <a:r>
-              <a:rPr lang="en-US" b="1" dirty="0">
-                <a:solidFill>
-                  <a:srgbClr val="0000FF"/>
-                </a:solidFill>
-                <a:latin typeface="Calibri"/>
-                <a:ea typeface="Calibri"/>
-                <a:cs typeface="Calibri"/>
-                <a:sym typeface="Calibri"/>
-              </a:rPr>
-              <a:t>Confidence Interval (CI)</a:t>
-            </a:r>
-            <a:r>
-              <a:rPr lang="en-US" dirty="0">
-                <a:solidFill>
-                  <a:schemeClr val="dk1"/>
-                </a:solidFill>
-                <a:latin typeface="Calibri"/>
-                <a:ea typeface="Calibri"/>
-                <a:cs typeface="Calibri"/>
-                <a:sym typeface="Calibri"/>
-              </a:rPr>
-              <a:t>. A 95% CI is the interval that </a:t>
-            </a:r>
-          </a:p>
-          <a:p>
-            <a:pPr marL="0" marR="0" lvl="0" indent="0" algn="l" rtl="0">
-              <a:spcBef>
-                <a:spcPts val="0"/>
-              </a:spcBef>
-              <a:spcAft>
-                <a:spcPts val="0"/>
-              </a:spcAft>
-              <a:buSzPts val="1100"/>
-              <a:buNone/>
-            </a:pPr>
-            <a:r>
-              <a:rPr lang="en-US" dirty="0">
-                <a:solidFill>
-                  <a:schemeClr val="dk1"/>
-                </a:solidFill>
-                <a:latin typeface="Calibri"/>
-                <a:ea typeface="Calibri"/>
-                <a:cs typeface="Calibri"/>
-                <a:sym typeface="Calibri"/>
-              </a:rPr>
-              <a:t>you are 95% certain contains the true population value </a:t>
-            </a:r>
-          </a:p>
-          <a:p>
-            <a:pPr marL="0" marR="0" lvl="0" indent="0" algn="l" rtl="0">
-              <a:spcBef>
-                <a:spcPts val="0"/>
-              </a:spcBef>
-              <a:spcAft>
-                <a:spcPts val="0"/>
-              </a:spcAft>
-              <a:buSzPts val="1100"/>
-              <a:buNone/>
-            </a:pPr>
-            <a:r>
-              <a:rPr lang="en-US" dirty="0">
-                <a:solidFill>
-                  <a:schemeClr val="dk1"/>
-                </a:solidFill>
-                <a:latin typeface="Calibri"/>
-                <a:ea typeface="Calibri"/>
-                <a:cs typeface="Calibri"/>
-                <a:sym typeface="Calibri"/>
-              </a:rPr>
-              <a:t>as it might be estimated from a much larger study.</a:t>
-            </a:r>
-          </a:p>
-          <a:p>
-            <a:pPr>
-              <a:buSzPts val="1100"/>
-            </a:pPr>
-            <a:r>
-              <a:rPr lang="en-US" dirty="0">
-                <a:solidFill>
-                  <a:schemeClr val="dk1"/>
-                </a:solidFill>
-                <a:latin typeface="Calibri"/>
-                <a:ea typeface="Calibri"/>
-                <a:cs typeface="Calibri"/>
-                <a:sym typeface="Calibri"/>
-              </a:rPr>
-              <a:t> </a:t>
-            </a:r>
-            <a:r>
-              <a:rPr lang="en-US" dirty="0"/>
-              <a:t>- </a:t>
-            </a:r>
-            <a:r>
-              <a:rPr lang="en-US" dirty="0">
-                <a:hlinkClick r:id="rId3"/>
-              </a:rPr>
-              <a:t>https://en.wikipedia.org/wiki/Confidence_interval</a:t>
-            </a:r>
-            <a:r>
-              <a:rPr lang="en-US" dirty="0"/>
-              <a:t> </a:t>
-            </a:r>
-          </a:p>
-          <a:p>
-            <a:pPr marL="0" marR="0" lvl="0" indent="0" algn="l" rtl="0">
-              <a:spcBef>
-                <a:spcPts val="0"/>
-              </a:spcBef>
-              <a:spcAft>
-                <a:spcPts val="0"/>
-              </a:spcAft>
-              <a:buSzPts val="1100"/>
-              <a:buNone/>
-            </a:pPr>
-            <a:endParaRPr lang="en-US" dirty="0">
-              <a:solidFill>
-                <a:schemeClr val="dk1"/>
-              </a:solidFill>
-              <a:latin typeface="Calibri"/>
-              <a:ea typeface="Calibri"/>
-              <a:cs typeface="Calibri"/>
-              <a:sym typeface="Calibri"/>
-            </a:endParaRPr>
-          </a:p>
-          <a:p>
-            <a:pPr lvl="0">
-              <a:buSzPts val="1100"/>
-            </a:pPr>
-            <a:r>
-              <a:rPr lang="en-US" b="1" dirty="0">
-                <a:solidFill>
-                  <a:srgbClr val="0000FF"/>
-                </a:solidFill>
-                <a:latin typeface="Calibri"/>
-                <a:cs typeface="Calibri"/>
-                <a:sym typeface="Calibri"/>
-              </a:rPr>
-              <a:t>Critical Value</a:t>
-            </a:r>
-            <a:r>
-              <a:rPr lang="en-US" dirty="0">
-                <a:solidFill>
-                  <a:schemeClr val="dk1"/>
-                </a:solidFill>
-                <a:latin typeface="Calibri"/>
-                <a:cs typeface="Calibri"/>
-                <a:sym typeface="Calibri"/>
-              </a:rPr>
-              <a:t> - point on the distribution at which </a:t>
-            </a:r>
-          </a:p>
-          <a:p>
-            <a:pPr lvl="0">
-              <a:buSzPts val="1100"/>
-            </a:pPr>
-            <a:r>
-              <a:rPr lang="en-US" dirty="0">
-                <a:solidFill>
-                  <a:schemeClr val="dk1"/>
-                </a:solidFill>
-                <a:latin typeface="Calibri"/>
-                <a:cs typeface="Calibri"/>
-                <a:sym typeface="Calibri"/>
-              </a:rPr>
-              <a:t>we shift from "Fail to reject" to "Reject".</a:t>
-            </a:r>
-          </a:p>
-          <a:p>
-            <a:pPr marL="0" marR="0" lvl="0" indent="0" algn="l" rtl="0">
-              <a:spcBef>
-                <a:spcPts val="0"/>
-              </a:spcBef>
-              <a:spcAft>
-                <a:spcPts val="0"/>
-              </a:spcAft>
-              <a:buSzPts val="1100"/>
-              <a:buNone/>
-            </a:pPr>
-            <a:endParaRPr dirty="0">
-              <a:solidFill>
-                <a:schemeClr val="dk1"/>
-              </a:solidFill>
-              <a:latin typeface="Calibri"/>
-              <a:ea typeface="Calibri"/>
-              <a:cs typeface="Calibri"/>
-              <a:sym typeface="Calibri"/>
-            </a:endParaRPr>
-          </a:p>
-          <a:p>
-            <a:pPr marL="0" marR="0" lvl="0" indent="0" algn="l" rtl="0">
-              <a:spcBef>
-                <a:spcPts val="0"/>
-              </a:spcBef>
-              <a:spcAft>
-                <a:spcPts val="0"/>
-              </a:spcAft>
-              <a:buSzPts val="1100"/>
-              <a:buNone/>
-            </a:pPr>
-            <a:r>
-              <a:rPr lang="en-US" b="1" dirty="0">
-                <a:solidFill>
-                  <a:srgbClr val="0000FF"/>
-                </a:solidFill>
-                <a:latin typeface="Calibri"/>
-                <a:ea typeface="Calibri"/>
-                <a:cs typeface="Calibri"/>
-                <a:sym typeface="Calibri"/>
-              </a:rPr>
-              <a:t>z-score</a:t>
-            </a:r>
-            <a:r>
-              <a:rPr lang="en-US" dirty="0">
-                <a:solidFill>
-                  <a:schemeClr val="dk1"/>
-                </a:solidFill>
-                <a:latin typeface="Calibri"/>
-                <a:ea typeface="Calibri"/>
-                <a:cs typeface="Calibri"/>
-                <a:sym typeface="Calibri"/>
-              </a:rPr>
-              <a:t> is the distance from the mean </a:t>
-            </a:r>
-          </a:p>
-          <a:p>
-            <a:pPr marL="0" marR="0" lvl="0" indent="0" algn="l" rtl="0">
-              <a:spcBef>
-                <a:spcPts val="0"/>
-              </a:spcBef>
-              <a:spcAft>
-                <a:spcPts val="0"/>
-              </a:spcAft>
-              <a:buSzPts val="1100"/>
-              <a:buNone/>
-            </a:pPr>
-            <a:r>
-              <a:rPr lang="en-US" dirty="0">
-                <a:solidFill>
-                  <a:schemeClr val="dk1"/>
-                </a:solidFill>
-                <a:latin typeface="Calibri"/>
-                <a:ea typeface="Calibri"/>
-                <a:cs typeface="Calibri"/>
-                <a:sym typeface="Calibri"/>
-              </a:rPr>
-              <a:t>measured in the number of standard deviations.</a:t>
-            </a:r>
-          </a:p>
-          <a:p>
-            <a:pPr marL="0" marR="0" lvl="0" indent="0" algn="l" rtl="0">
-              <a:spcBef>
-                <a:spcPts val="0"/>
-              </a:spcBef>
-              <a:spcAft>
-                <a:spcPts val="0"/>
-              </a:spcAft>
-              <a:buSzPts val="1100"/>
-              <a:buNone/>
-            </a:pPr>
-            <a:endParaRPr lang="en-US" dirty="0">
-              <a:solidFill>
-                <a:schemeClr val="dk1"/>
-              </a:solidFill>
-              <a:latin typeface="Calibri"/>
-              <a:ea typeface="Calibri"/>
-              <a:cs typeface="Calibri"/>
-              <a:sym typeface="Calibri"/>
-            </a:endParaRPr>
-          </a:p>
-          <a:p>
-            <a:pPr lvl="0">
-              <a:buSzPts val="1100"/>
-            </a:pPr>
-            <a:r>
-              <a:rPr lang="en-US" b="1" dirty="0">
-                <a:solidFill>
-                  <a:srgbClr val="0000FF"/>
-                </a:solidFill>
-                <a:latin typeface="Calibri"/>
-                <a:cs typeface="Calibri"/>
-                <a:sym typeface="Calibri"/>
-              </a:rPr>
-              <a:t>Margin of Error </a:t>
-            </a:r>
-            <a:r>
-              <a:rPr lang="en-US" dirty="0">
-                <a:solidFill>
-                  <a:schemeClr val="dk1"/>
-                </a:solidFill>
-                <a:latin typeface="Calibri"/>
-                <a:ea typeface="Calibri"/>
-                <a:cs typeface="Calibri"/>
-                <a:sym typeface="Calibri"/>
-              </a:rPr>
-              <a:t>– amount of random sampling error in the results</a:t>
-            </a:r>
-          </a:p>
-          <a:p>
-            <a:pPr marL="0" marR="0" lvl="0" indent="0" algn="l" rtl="0">
-              <a:spcBef>
-                <a:spcPts val="0"/>
-              </a:spcBef>
-              <a:spcAft>
-                <a:spcPts val="0"/>
-              </a:spcAft>
-              <a:buSzPts val="1100"/>
-              <a:buNone/>
-            </a:pPr>
-            <a:r>
-              <a:rPr lang="en-US" sz="1200" dirty="0">
-                <a:solidFill>
-                  <a:schemeClr val="dk1"/>
-                </a:solidFill>
-                <a:latin typeface="Calibri"/>
-                <a:ea typeface="Calibri"/>
-                <a:cs typeface="Calibri"/>
-                <a:sym typeface="Calibri"/>
-              </a:rPr>
-              <a:t> - </a:t>
-            </a:r>
-            <a:r>
-              <a:rPr lang="en-US" sz="1200" dirty="0">
-                <a:solidFill>
-                  <a:schemeClr val="dk1"/>
-                </a:solidFill>
-                <a:latin typeface="Calibri"/>
-                <a:ea typeface="Calibri"/>
-                <a:cs typeface="Calibri"/>
-                <a:sym typeface="Calibri"/>
-                <a:hlinkClick r:id="rId4"/>
-              </a:rPr>
-              <a:t>https://en.wikipedia.org/wiki/Margin_of_error</a:t>
-            </a:r>
-            <a:endParaRPr lang="en-US" sz="1200" dirty="0">
-              <a:solidFill>
-                <a:schemeClr val="dk1"/>
-              </a:solidFill>
-              <a:latin typeface="Calibri"/>
-              <a:ea typeface="Calibri"/>
-              <a:cs typeface="Calibri"/>
-              <a:sym typeface="Calibri"/>
-            </a:endParaRPr>
-          </a:p>
-          <a:p>
-            <a:pPr lvl="0">
-              <a:buSzPts val="1100"/>
-            </a:pPr>
-            <a:r>
-              <a:rPr lang="en-US" sz="1200" dirty="0">
-                <a:solidFill>
-                  <a:schemeClr val="dk1"/>
-                </a:solidFill>
-                <a:latin typeface="Calibri"/>
-                <a:ea typeface="Calibri"/>
-                <a:cs typeface="Calibri"/>
-                <a:sym typeface="Calibri"/>
-              </a:rPr>
-              <a:t> - </a:t>
-            </a:r>
-            <a:r>
-              <a:rPr lang="en-US" sz="1200" dirty="0">
-                <a:solidFill>
-                  <a:schemeClr val="dk1"/>
-                </a:solidFill>
-                <a:latin typeface="Calibri"/>
-                <a:ea typeface="Calibri"/>
-                <a:cs typeface="Calibri"/>
-                <a:sym typeface="Calibri"/>
-                <a:hlinkClick r:id="rId5"/>
-              </a:rPr>
-              <a:t>https://www.surveymonkey.com/mp/margin-of-error-calculator/</a:t>
-            </a:r>
-            <a:r>
-              <a:rPr lang="en-US" sz="1200" dirty="0">
-                <a:solidFill>
-                  <a:schemeClr val="dk1"/>
-                </a:solidFill>
-                <a:latin typeface="Calibri"/>
-                <a:ea typeface="Calibri"/>
-                <a:cs typeface="Calibri"/>
-                <a:sym typeface="Calibri"/>
-              </a:rPr>
-              <a:t> </a:t>
-            </a:r>
-          </a:p>
-          <a:p>
-            <a:pPr lvl="0">
-              <a:buSzPts val="1100"/>
-            </a:pPr>
-            <a:r>
-              <a:rPr lang="en-US" sz="1200" dirty="0">
-                <a:solidFill>
-                  <a:schemeClr val="dk1"/>
-                </a:solidFill>
-                <a:latin typeface="Calibri"/>
-                <a:ea typeface="Calibri"/>
-                <a:cs typeface="Calibri"/>
-                <a:sym typeface="Calibri"/>
-              </a:rPr>
-              <a:t> - </a:t>
-            </a:r>
-            <a:r>
-              <a:rPr lang="en-US" sz="1200" dirty="0">
-                <a:solidFill>
-                  <a:schemeClr val="dk1"/>
-                </a:solidFill>
-                <a:latin typeface="Calibri"/>
-                <a:ea typeface="Calibri"/>
-                <a:cs typeface="Calibri"/>
-                <a:sym typeface="Calibri"/>
-                <a:hlinkClick r:id="rId6"/>
-              </a:rPr>
-              <a:t>https://www.dummies.com/education/math/statistics/how-sample-size-affects-the-margin-of-error/</a:t>
-            </a:r>
-            <a:r>
-              <a:rPr lang="en-US" sz="1200" dirty="0">
-                <a:solidFill>
-                  <a:schemeClr val="dk1"/>
-                </a:solidFill>
-                <a:latin typeface="Calibri"/>
-                <a:ea typeface="Calibri"/>
-                <a:cs typeface="Calibri"/>
-                <a:sym typeface="Calibri"/>
-              </a:rPr>
-              <a:t> </a:t>
-            </a:r>
-          </a:p>
-          <a:p>
-            <a:pPr lvl="0">
-              <a:buSzPts val="1100"/>
-            </a:pPr>
-            <a:endParaRPr dirty="0">
-              <a:solidFill>
-                <a:schemeClr val="dk1"/>
-              </a:solidFill>
-              <a:latin typeface="Calibri"/>
-              <a:ea typeface="Calibri"/>
-              <a:cs typeface="Calibri"/>
-              <a:sym typeface="Calibri"/>
-            </a:endParaRPr>
-          </a:p>
-        </p:txBody>
-      </p:sp>
-      <p:sp>
-        <p:nvSpPr>
-          <p:cNvPr id="11" name="Google Shape;106;p15">
-            <a:extLst>
-              <a:ext uri="{FF2B5EF4-FFF2-40B4-BE49-F238E27FC236}">
-                <a16:creationId xmlns:a16="http://schemas.microsoft.com/office/drawing/2014/main" id="{42C5FB0F-C4C7-4240-9D50-49391168D970}"/>
-              </a:ext>
-            </a:extLst>
-          </p:cNvPr>
-          <p:cNvSpPr txBox="1"/>
-          <p:nvPr/>
-        </p:nvSpPr>
-        <p:spPr>
-          <a:xfrm>
-            <a:off x="0" y="0"/>
-            <a:ext cx="5893043" cy="486121"/>
-          </a:xfrm>
-          <a:prstGeom prst="rect">
-            <a:avLst/>
-          </a:prstGeom>
-          <a:noFill/>
-          <a:ln>
-            <a:noFill/>
-          </a:ln>
-        </p:spPr>
-        <p:txBody>
-          <a:bodyPr spcFirstLastPara="1" wrap="square" lIns="91425" tIns="45700" rIns="91425" bIns="45700" anchor="t" anchorCtr="0">
-            <a:noAutofit/>
-          </a:bodyPr>
-          <a:lstStyle/>
-          <a:p>
-            <a:pPr marL="0" marR="0" lvl="0" indent="0" algn="l" rtl="0">
-              <a:spcBef>
-                <a:spcPts val="0"/>
-              </a:spcBef>
-              <a:spcAft>
-                <a:spcPts val="0"/>
-              </a:spcAft>
-              <a:buNone/>
-            </a:pPr>
-            <a:r>
-              <a:rPr lang="en-US" sz="2800" b="1" dirty="0">
-                <a:solidFill>
-                  <a:schemeClr val="dk1"/>
-                </a:solidFill>
-                <a:latin typeface="Calibri"/>
-                <a:ea typeface="Calibri"/>
-                <a:cs typeface="Calibri"/>
-                <a:sym typeface="Calibri"/>
-              </a:rPr>
-              <a:t>p-value &amp; null hypothesis - continued</a:t>
-            </a:r>
-            <a:endParaRPr sz="2800" b="1" dirty="0">
-              <a:solidFill>
-                <a:schemeClr val="dk1"/>
-              </a:solidFill>
-              <a:latin typeface="Calibri"/>
-              <a:ea typeface="Calibri"/>
-              <a:cs typeface="Calibri"/>
-              <a:sym typeface="Calibri"/>
-            </a:endParaRPr>
-          </a:p>
-          <a:p>
-            <a:pPr lvl="0">
-              <a:buSzPts val="1100"/>
-            </a:pPr>
-            <a:endParaRPr dirty="0">
-              <a:solidFill>
-                <a:schemeClr val="dk1"/>
-              </a:solidFill>
-              <a:latin typeface="Calibri"/>
-              <a:ea typeface="Calibri"/>
-              <a:cs typeface="Calibri"/>
-              <a:sym typeface="Calibri"/>
-            </a:endParaRPr>
-          </a:p>
-        </p:txBody>
-      </p:sp>
-      <p:pic>
-        <p:nvPicPr>
-          <p:cNvPr id="1028" name="Picture 4">
-            <a:extLst>
-              <a:ext uri="{FF2B5EF4-FFF2-40B4-BE49-F238E27FC236}">
-                <a16:creationId xmlns:a16="http://schemas.microsoft.com/office/drawing/2014/main" id="{B897F46F-4E04-0A40-B03C-D20DF5E3E1D2}"/>
-              </a:ext>
-            </a:extLst>
-          </p:cNvPr>
-          <p:cNvPicPr>
-            <a:picLocks noChangeAspect="1" noChangeArrowheads="1"/>
-          </p:cNvPicPr>
-          <p:nvPr/>
-        </p:nvPicPr>
-        <p:blipFill>
-          <a:blip r:embed="rId7" cstate="email">
-            <a:extLst>
-              <a:ext uri="{28A0092B-C50C-407E-A947-70E740481C1C}">
-                <a14:useLocalDpi xmlns:a14="http://schemas.microsoft.com/office/drawing/2010/main"/>
-              </a:ext>
-            </a:extLst>
-          </a:blip>
-          <a:srcRect/>
-          <a:stretch>
-            <a:fillRect/>
-          </a:stretch>
-        </p:blipFill>
-        <p:spPr bwMode="auto">
-          <a:xfrm>
-            <a:off x="7311589" y="1572879"/>
-            <a:ext cx="4880411" cy="3486009"/>
-          </a:xfrm>
-          <a:prstGeom prst="rect">
-            <a:avLst/>
-          </a:prstGeom>
-          <a:noFill/>
-          <a:extLst>
-            <a:ext uri="{909E8E84-426E-40DD-AFC4-6F175D3DCCD1}">
-              <a14:hiddenFill xmlns:a14="http://schemas.microsoft.com/office/drawing/2010/main">
-                <a:solidFill>
-                  <a:srgbClr val="FFFFFF"/>
-                </a:solidFill>
-              </a14:hiddenFill>
-            </a:ext>
-          </a:extLst>
-        </p:spPr>
-      </p:pic>
-      <p:sp>
-        <p:nvSpPr>
-          <p:cNvPr id="4" name="TextBox 3">
-            <a:extLst>
-              <a:ext uri="{FF2B5EF4-FFF2-40B4-BE49-F238E27FC236}">
-                <a16:creationId xmlns:a16="http://schemas.microsoft.com/office/drawing/2014/main" id="{A9134AC6-C3A4-CC44-90D3-E9F229529F13}"/>
-              </a:ext>
-            </a:extLst>
-          </p:cNvPr>
-          <p:cNvSpPr txBox="1"/>
-          <p:nvPr/>
-        </p:nvSpPr>
-        <p:spPr>
-          <a:xfrm>
-            <a:off x="9294592" y="4990310"/>
-            <a:ext cx="985653" cy="461665"/>
-          </a:xfrm>
-          <a:prstGeom prst="rect">
-            <a:avLst/>
-          </a:prstGeom>
-          <a:noFill/>
-        </p:spPr>
-        <p:txBody>
-          <a:bodyPr wrap="square" rtlCol="0">
-            <a:spAutoFit/>
-          </a:bodyPr>
-          <a:lstStyle/>
-          <a:p>
-            <a:pPr algn="ctr"/>
-            <a:r>
-              <a:rPr lang="en-US" sz="1200" dirty="0">
-                <a:solidFill>
-                  <a:srgbClr val="0070C0"/>
-                </a:solidFill>
-              </a:rPr>
-              <a:t>Confidence Interval</a:t>
-            </a:r>
-          </a:p>
-        </p:txBody>
-      </p:sp>
-      <p:sp>
-        <p:nvSpPr>
-          <p:cNvPr id="15" name="TextBox 14">
-            <a:extLst>
-              <a:ext uri="{FF2B5EF4-FFF2-40B4-BE49-F238E27FC236}">
-                <a16:creationId xmlns:a16="http://schemas.microsoft.com/office/drawing/2014/main" id="{918A6FD3-4C88-3242-83A2-D7AEFF1E9705}"/>
-              </a:ext>
-            </a:extLst>
-          </p:cNvPr>
-          <p:cNvSpPr txBox="1"/>
-          <p:nvPr/>
-        </p:nvSpPr>
-        <p:spPr>
-          <a:xfrm>
-            <a:off x="10903614" y="4990309"/>
-            <a:ext cx="665016" cy="461665"/>
-          </a:xfrm>
-          <a:prstGeom prst="rect">
-            <a:avLst/>
-          </a:prstGeom>
-          <a:noFill/>
-        </p:spPr>
-        <p:txBody>
-          <a:bodyPr wrap="square" rtlCol="0">
-            <a:spAutoFit/>
-          </a:bodyPr>
-          <a:lstStyle/>
-          <a:p>
-            <a:pPr algn="ctr"/>
-            <a:r>
-              <a:rPr lang="en-US" sz="1200" dirty="0">
-                <a:solidFill>
-                  <a:srgbClr val="0070C0"/>
-                </a:solidFill>
-              </a:rPr>
-              <a:t>Critical Region</a:t>
-            </a:r>
-          </a:p>
-        </p:txBody>
-      </p:sp>
-      <p:sp>
-        <p:nvSpPr>
-          <p:cNvPr id="16" name="TextBox 15">
-            <a:extLst>
-              <a:ext uri="{FF2B5EF4-FFF2-40B4-BE49-F238E27FC236}">
-                <a16:creationId xmlns:a16="http://schemas.microsoft.com/office/drawing/2014/main" id="{4AD1A45B-315F-6045-AC9A-784CD060989C}"/>
-              </a:ext>
-            </a:extLst>
-          </p:cNvPr>
-          <p:cNvSpPr txBox="1"/>
-          <p:nvPr/>
-        </p:nvSpPr>
-        <p:spPr>
-          <a:xfrm>
-            <a:off x="8061800" y="4990309"/>
-            <a:ext cx="665016" cy="461665"/>
-          </a:xfrm>
-          <a:prstGeom prst="rect">
-            <a:avLst/>
-          </a:prstGeom>
-          <a:noFill/>
-        </p:spPr>
-        <p:txBody>
-          <a:bodyPr wrap="square" rtlCol="0">
-            <a:spAutoFit/>
-          </a:bodyPr>
-          <a:lstStyle/>
-          <a:p>
-            <a:pPr algn="ctr"/>
-            <a:r>
-              <a:rPr lang="en-US" sz="1200" dirty="0">
-                <a:solidFill>
-                  <a:srgbClr val="0070C0"/>
-                </a:solidFill>
-              </a:rPr>
-              <a:t>Critical Region</a:t>
-            </a:r>
-          </a:p>
-        </p:txBody>
-      </p:sp>
-      <p:sp>
-        <p:nvSpPr>
-          <p:cNvPr id="2" name="TextBox 1">
-            <a:extLst>
-              <a:ext uri="{FF2B5EF4-FFF2-40B4-BE49-F238E27FC236}">
-                <a16:creationId xmlns:a16="http://schemas.microsoft.com/office/drawing/2014/main" id="{6CCBE7CE-67B9-FAE7-CE4B-83BD55B366C4}"/>
-              </a:ext>
-            </a:extLst>
-          </p:cNvPr>
-          <p:cNvSpPr txBox="1"/>
-          <p:nvPr/>
-        </p:nvSpPr>
-        <p:spPr>
-          <a:xfrm>
-            <a:off x="366230" y="5463250"/>
-            <a:ext cx="6384489" cy="523220"/>
-          </a:xfrm>
-          <a:prstGeom prst="rect">
-            <a:avLst/>
-          </a:prstGeom>
-          <a:noFill/>
-        </p:spPr>
-        <p:txBody>
-          <a:bodyPr wrap="square" rtlCol="0">
-            <a:spAutoFit/>
-          </a:bodyPr>
-          <a:lstStyle/>
-          <a:p>
-            <a:pPr marL="285750" indent="-285750">
-              <a:buFont typeface="Arial" panose="020B0604020202020204" pitchFamily="34" charset="0"/>
-              <a:buChar char="•"/>
-            </a:pPr>
-            <a:r>
-              <a:rPr lang="en-US">
-                <a:latin typeface="Calibri" panose="020F0502020204030204" pitchFamily="34" charset="0"/>
-                <a:cs typeface="Calibri" panose="020F0502020204030204" pitchFamily="34" charset="0"/>
-              </a:rPr>
-              <a:t>sample size and margin of error have an inverse relationship</a:t>
-            </a:r>
-          </a:p>
-          <a:p>
-            <a:pPr marL="285750" indent="-285750">
-              <a:buFont typeface="Arial" panose="020B0604020202020204" pitchFamily="34" charset="0"/>
-              <a:buChar char="•"/>
-            </a:pPr>
-            <a:r>
-              <a:rPr lang="en-US">
-                <a:latin typeface="Calibri" panose="020F0502020204030204" pitchFamily="34" charset="0"/>
-                <a:cs typeface="Calibri" panose="020F0502020204030204" pitchFamily="34" charset="0"/>
-              </a:rPr>
-              <a:t>after a point, further increasing the sample size gives you a diminished return</a:t>
-            </a:r>
-          </a:p>
-        </p:txBody>
-      </p:sp>
-    </p:spTree>
-    <p:extLst>
-      <p:ext uri="{BB962C8B-B14F-4D97-AF65-F5344CB8AC3E}">
-        <p14:creationId xmlns:p14="http://schemas.microsoft.com/office/powerpoint/2010/main" val="1243422980"/>
       </p:ext>
     </p:extLst>
   </p:cSld>
